--- a/Personal Library Manager.pptx
+++ b/Personal Library Manager.pptx
@@ -4,13 +4,17 @@
   <p:sldMasterIdLst>
     <p:sldMasterId id="2147483744" r:id="rId1"/>
   </p:sldMasterIdLst>
+  <p:notesMasterIdLst>
+    <p:notesMasterId r:id="rId9"/>
+  </p:notesMasterIdLst>
   <p:sldIdLst>
     <p:sldId id="256" r:id="rId2"/>
     <p:sldId id="257" r:id="rId3"/>
     <p:sldId id="258" r:id="rId4"/>
-    <p:sldId id="259" r:id="rId5"/>
+    <p:sldId id="262" r:id="rId5"/>
     <p:sldId id="260" r:id="rId6"/>
-    <p:sldId id="261" r:id="rId7"/>
+    <p:sldId id="263" r:id="rId7"/>
+    <p:sldId id="261" r:id="rId8"/>
   </p:sldIdLst>
   <p:sldSz cx="9144000" cy="6858000" type="screen4x3"/>
   <p:notesSz cx="6858000" cy="9144000"/>
@@ -112,6 +116,440 @@
 </p:presentation>
 </file>
 
+<file path=ppt/notesMasters/notesMaster1.xml><?xml version="1.0" encoding="utf-8"?>
+<p:notesMaster xmlns:a="http://schemas.openxmlformats.org/drawingml/2006/main" xmlns:r="http://schemas.openxmlformats.org/officeDocument/2006/relationships" xmlns:p="http://schemas.openxmlformats.org/presentationml/2006/main">
+  <p:cSld>
+    <p:bg>
+      <p:bgRef idx="1001">
+        <a:schemeClr val="bg1"/>
+      </p:bgRef>
+    </p:bg>
+    <p:spTree>
+      <p:nvGrpSpPr>
+        <p:cNvPr id="1" name=""/>
+        <p:cNvGrpSpPr/>
+        <p:nvPr/>
+      </p:nvGrpSpPr>
+      <p:grpSpPr>
+        <a:xfrm>
+          <a:off x="0" y="0"/>
+          <a:ext cx="0" cy="0"/>
+          <a:chOff x="0" y="0"/>
+          <a:chExt cx="0" cy="0"/>
+        </a:xfrm>
+      </p:grpSpPr>
+      <p:sp>
+        <p:nvSpPr>
+          <p:cNvPr id="2" name="Верхний колонтитул 1"/>
+          <p:cNvSpPr>
+            <a:spLocks noGrp="1"/>
+          </p:cNvSpPr>
+          <p:nvPr>
+            <p:ph type="hdr" sz="quarter"/>
+          </p:nvPr>
+        </p:nvSpPr>
+        <p:spPr>
+          <a:xfrm>
+            <a:off x="0" y="0"/>
+            <a:ext cx="2971800" cy="457200"/>
+          </a:xfrm>
+          <a:prstGeom prst="rect">
+            <a:avLst/>
+          </a:prstGeom>
+        </p:spPr>
+        <p:txBody>
+          <a:bodyPr vert="horz" lIns="91440" tIns="45720" rIns="91440" bIns="45720" rtlCol="0"/>
+          <a:lstStyle>
+            <a:lvl1pPr algn="l">
+              <a:defRPr sz="1200"/>
+            </a:lvl1pPr>
+          </a:lstStyle>
+          <a:p>
+            <a:endParaRPr lang="ru-RU"/>
+          </a:p>
+        </p:txBody>
+      </p:sp>
+      <p:sp>
+        <p:nvSpPr>
+          <p:cNvPr id="3" name="Дата 2"/>
+          <p:cNvSpPr>
+            <a:spLocks noGrp="1"/>
+          </p:cNvSpPr>
+          <p:nvPr>
+            <p:ph type="dt" idx="1"/>
+          </p:nvPr>
+        </p:nvSpPr>
+        <p:spPr>
+          <a:xfrm>
+            <a:off x="3884613" y="0"/>
+            <a:ext cx="2971800" cy="457200"/>
+          </a:xfrm>
+          <a:prstGeom prst="rect">
+            <a:avLst/>
+          </a:prstGeom>
+        </p:spPr>
+        <p:txBody>
+          <a:bodyPr vert="horz" lIns="91440" tIns="45720" rIns="91440" bIns="45720" rtlCol="0"/>
+          <a:lstStyle>
+            <a:lvl1pPr algn="r">
+              <a:defRPr sz="1200"/>
+            </a:lvl1pPr>
+          </a:lstStyle>
+          <a:p>
+            <a:fld id="{BBC675EC-8929-4E9D-8D91-5B4BD63F0FC1}" type="datetimeFigureOut">
+              <a:rPr lang="ru-RU" smtClean="0"/>
+              <a:t>13.05.2026</a:t>
+            </a:fld>
+            <a:endParaRPr lang="ru-RU"/>
+          </a:p>
+        </p:txBody>
+      </p:sp>
+      <p:sp>
+        <p:nvSpPr>
+          <p:cNvPr id="4" name="Образ слайда 3"/>
+          <p:cNvSpPr>
+            <a:spLocks noGrp="1" noRot="1" noChangeAspect="1"/>
+          </p:cNvSpPr>
+          <p:nvPr>
+            <p:ph type="sldImg" idx="2"/>
+          </p:nvPr>
+        </p:nvSpPr>
+        <p:spPr>
+          <a:xfrm>
+            <a:off x="1143000" y="685800"/>
+            <a:ext cx="4572000" cy="3429000"/>
+          </a:xfrm>
+          <a:prstGeom prst="rect">
+            <a:avLst/>
+          </a:prstGeom>
+          <a:noFill/>
+          <a:ln w="12700">
+            <a:solidFill>
+              <a:prstClr val="black"/>
+            </a:solidFill>
+          </a:ln>
+        </p:spPr>
+        <p:txBody>
+          <a:bodyPr vert="horz" lIns="91440" tIns="45720" rIns="91440" bIns="45720" rtlCol="0" anchor="ctr"/>
+          <a:lstStyle/>
+          <a:p>
+            <a:endParaRPr lang="ru-RU"/>
+          </a:p>
+        </p:txBody>
+      </p:sp>
+      <p:sp>
+        <p:nvSpPr>
+          <p:cNvPr id="5" name="Заметки 4"/>
+          <p:cNvSpPr>
+            <a:spLocks noGrp="1"/>
+          </p:cNvSpPr>
+          <p:nvPr>
+            <p:ph type="body" sz="quarter" idx="3"/>
+          </p:nvPr>
+        </p:nvSpPr>
+        <p:spPr>
+          <a:xfrm>
+            <a:off x="685800" y="4343400"/>
+            <a:ext cx="5486400" cy="4114800"/>
+          </a:xfrm>
+          <a:prstGeom prst="rect">
+            <a:avLst/>
+          </a:prstGeom>
+        </p:spPr>
+        <p:txBody>
+          <a:bodyPr vert="horz" lIns="91440" tIns="45720" rIns="91440" bIns="45720" rtlCol="0"/>
+          <a:lstStyle/>
+          <a:p>
+            <a:pPr lvl="0"/>
+            <a:r>
+              <a:rPr lang="ru-RU" smtClean="0"/>
+              <a:t>Образец текста</a:t>
+            </a:r>
+          </a:p>
+          <a:p>
+            <a:pPr lvl="1"/>
+            <a:r>
+              <a:rPr lang="ru-RU" smtClean="0"/>
+              <a:t>Второй уровень</a:t>
+            </a:r>
+          </a:p>
+          <a:p>
+            <a:pPr lvl="2"/>
+            <a:r>
+              <a:rPr lang="ru-RU" smtClean="0"/>
+              <a:t>Третий уровень</a:t>
+            </a:r>
+          </a:p>
+          <a:p>
+            <a:pPr lvl="3"/>
+            <a:r>
+              <a:rPr lang="ru-RU" smtClean="0"/>
+              <a:t>Четвертый уровень</a:t>
+            </a:r>
+          </a:p>
+          <a:p>
+            <a:pPr lvl="4"/>
+            <a:r>
+              <a:rPr lang="ru-RU" smtClean="0"/>
+              <a:t>Пятый уровень</a:t>
+            </a:r>
+            <a:endParaRPr lang="ru-RU"/>
+          </a:p>
+        </p:txBody>
+      </p:sp>
+      <p:sp>
+        <p:nvSpPr>
+          <p:cNvPr id="6" name="Нижний колонтитул 5"/>
+          <p:cNvSpPr>
+            <a:spLocks noGrp="1"/>
+          </p:cNvSpPr>
+          <p:nvPr>
+            <p:ph type="ftr" sz="quarter" idx="4"/>
+          </p:nvPr>
+        </p:nvSpPr>
+        <p:spPr>
+          <a:xfrm>
+            <a:off x="0" y="8685213"/>
+            <a:ext cx="2971800" cy="457200"/>
+          </a:xfrm>
+          <a:prstGeom prst="rect">
+            <a:avLst/>
+          </a:prstGeom>
+        </p:spPr>
+        <p:txBody>
+          <a:bodyPr vert="horz" lIns="91440" tIns="45720" rIns="91440" bIns="45720" rtlCol="0" anchor="b"/>
+          <a:lstStyle>
+            <a:lvl1pPr algn="l">
+              <a:defRPr sz="1200"/>
+            </a:lvl1pPr>
+          </a:lstStyle>
+          <a:p>
+            <a:endParaRPr lang="ru-RU"/>
+          </a:p>
+        </p:txBody>
+      </p:sp>
+      <p:sp>
+        <p:nvSpPr>
+          <p:cNvPr id="7" name="Номер слайда 6"/>
+          <p:cNvSpPr>
+            <a:spLocks noGrp="1"/>
+          </p:cNvSpPr>
+          <p:nvPr>
+            <p:ph type="sldNum" sz="quarter" idx="5"/>
+          </p:nvPr>
+        </p:nvSpPr>
+        <p:spPr>
+          <a:xfrm>
+            <a:off x="3884613" y="8685213"/>
+            <a:ext cx="2971800" cy="457200"/>
+          </a:xfrm>
+          <a:prstGeom prst="rect">
+            <a:avLst/>
+          </a:prstGeom>
+        </p:spPr>
+        <p:txBody>
+          <a:bodyPr vert="horz" lIns="91440" tIns="45720" rIns="91440" bIns="45720" rtlCol="0" anchor="b"/>
+          <a:lstStyle>
+            <a:lvl1pPr algn="r">
+              <a:defRPr sz="1200"/>
+            </a:lvl1pPr>
+          </a:lstStyle>
+          <a:p>
+            <a:fld id="{A04877F8-27F3-450C-B9B9-2CB6006733C5}" type="slidenum">
+              <a:rPr lang="ru-RU" smtClean="0"/>
+              <a:t>‹#›</a:t>
+            </a:fld>
+            <a:endParaRPr lang="ru-RU"/>
+          </a:p>
+        </p:txBody>
+      </p:sp>
+    </p:spTree>
+    <p:extLst>
+      <p:ext uri="{BB962C8B-B14F-4D97-AF65-F5344CB8AC3E}">
+        <p14:creationId xmlns:p14="http://schemas.microsoft.com/office/powerpoint/2010/main" val="2654290857"/>
+      </p:ext>
+    </p:extLst>
+  </p:cSld>
+  <p:clrMap bg1="lt1" tx1="dk1" bg2="lt2" tx2="dk2" accent1="accent1" accent2="accent2" accent3="accent3" accent4="accent4" accent5="accent5" accent6="accent6" hlink="hlink" folHlink="folHlink"/>
+  <p:notesStyle>
+    <a:lvl1pPr marL="0" algn="l" defTabSz="914400" rtl="0" eaLnBrk="1" latinLnBrk="0" hangingPunct="1">
+      <a:defRPr sz="1200" kern="1200">
+        <a:solidFill>
+          <a:schemeClr val="tx1"/>
+        </a:solidFill>
+        <a:latin typeface="+mn-lt"/>
+        <a:ea typeface="+mn-ea"/>
+        <a:cs typeface="+mn-cs"/>
+      </a:defRPr>
+    </a:lvl1pPr>
+    <a:lvl2pPr marL="457200" algn="l" defTabSz="914400" rtl="0" eaLnBrk="1" latinLnBrk="0" hangingPunct="1">
+      <a:defRPr sz="1200" kern="1200">
+        <a:solidFill>
+          <a:schemeClr val="tx1"/>
+        </a:solidFill>
+        <a:latin typeface="+mn-lt"/>
+        <a:ea typeface="+mn-ea"/>
+        <a:cs typeface="+mn-cs"/>
+      </a:defRPr>
+    </a:lvl2pPr>
+    <a:lvl3pPr marL="914400" algn="l" defTabSz="914400" rtl="0" eaLnBrk="1" latinLnBrk="0" hangingPunct="1">
+      <a:defRPr sz="1200" kern="1200">
+        <a:solidFill>
+          <a:schemeClr val="tx1"/>
+        </a:solidFill>
+        <a:latin typeface="+mn-lt"/>
+        <a:ea typeface="+mn-ea"/>
+        <a:cs typeface="+mn-cs"/>
+      </a:defRPr>
+    </a:lvl3pPr>
+    <a:lvl4pPr marL="1371600" algn="l" defTabSz="914400" rtl="0" eaLnBrk="1" latinLnBrk="0" hangingPunct="1">
+      <a:defRPr sz="1200" kern="1200">
+        <a:solidFill>
+          <a:schemeClr val="tx1"/>
+        </a:solidFill>
+        <a:latin typeface="+mn-lt"/>
+        <a:ea typeface="+mn-ea"/>
+        <a:cs typeface="+mn-cs"/>
+      </a:defRPr>
+    </a:lvl4pPr>
+    <a:lvl5pPr marL="1828800" algn="l" defTabSz="914400" rtl="0" eaLnBrk="1" latinLnBrk="0" hangingPunct="1">
+      <a:defRPr sz="1200" kern="1200">
+        <a:solidFill>
+          <a:schemeClr val="tx1"/>
+        </a:solidFill>
+        <a:latin typeface="+mn-lt"/>
+        <a:ea typeface="+mn-ea"/>
+        <a:cs typeface="+mn-cs"/>
+      </a:defRPr>
+    </a:lvl5pPr>
+    <a:lvl6pPr marL="2286000" algn="l" defTabSz="914400" rtl="0" eaLnBrk="1" latinLnBrk="0" hangingPunct="1">
+      <a:defRPr sz="1200" kern="1200">
+        <a:solidFill>
+          <a:schemeClr val="tx1"/>
+        </a:solidFill>
+        <a:latin typeface="+mn-lt"/>
+        <a:ea typeface="+mn-ea"/>
+        <a:cs typeface="+mn-cs"/>
+      </a:defRPr>
+    </a:lvl6pPr>
+    <a:lvl7pPr marL="2743200" algn="l" defTabSz="914400" rtl="0" eaLnBrk="1" latinLnBrk="0" hangingPunct="1">
+      <a:defRPr sz="1200" kern="1200">
+        <a:solidFill>
+          <a:schemeClr val="tx1"/>
+        </a:solidFill>
+        <a:latin typeface="+mn-lt"/>
+        <a:ea typeface="+mn-ea"/>
+        <a:cs typeface="+mn-cs"/>
+      </a:defRPr>
+    </a:lvl7pPr>
+    <a:lvl8pPr marL="3200400" algn="l" defTabSz="914400" rtl="0" eaLnBrk="1" latinLnBrk="0" hangingPunct="1">
+      <a:defRPr sz="1200" kern="1200">
+        <a:solidFill>
+          <a:schemeClr val="tx1"/>
+        </a:solidFill>
+        <a:latin typeface="+mn-lt"/>
+        <a:ea typeface="+mn-ea"/>
+        <a:cs typeface="+mn-cs"/>
+      </a:defRPr>
+    </a:lvl8pPr>
+    <a:lvl9pPr marL="3657600" algn="l" defTabSz="914400" rtl="0" eaLnBrk="1" latinLnBrk="0" hangingPunct="1">
+      <a:defRPr sz="1200" kern="1200">
+        <a:solidFill>
+          <a:schemeClr val="tx1"/>
+        </a:solidFill>
+        <a:latin typeface="+mn-lt"/>
+        <a:ea typeface="+mn-ea"/>
+        <a:cs typeface="+mn-cs"/>
+      </a:defRPr>
+    </a:lvl9pPr>
+  </p:notesStyle>
+</p:notesMaster>
+</file>
+
+<file path=ppt/notesSlides/notesSlide1.xml><?xml version="1.0" encoding="utf-8"?>
+<p:notes xmlns:a="http://schemas.openxmlformats.org/drawingml/2006/main" xmlns:r="http://schemas.openxmlformats.org/officeDocument/2006/relationships" xmlns:p="http://schemas.openxmlformats.org/presentationml/2006/main">
+  <p:cSld>
+    <p:spTree>
+      <p:nvGrpSpPr>
+        <p:cNvPr id="1" name=""/>
+        <p:cNvGrpSpPr/>
+        <p:nvPr/>
+      </p:nvGrpSpPr>
+      <p:grpSpPr>
+        <a:xfrm>
+          <a:off x="0" y="0"/>
+          <a:ext cx="0" cy="0"/>
+          <a:chOff x="0" y="0"/>
+          <a:chExt cx="0" cy="0"/>
+        </a:xfrm>
+      </p:grpSpPr>
+      <p:sp>
+        <p:nvSpPr>
+          <p:cNvPr id="2" name="Образ слайда 1"/>
+          <p:cNvSpPr>
+            <a:spLocks noGrp="1" noRot="1" noChangeAspect="1"/>
+          </p:cNvSpPr>
+          <p:nvPr>
+            <p:ph type="sldImg"/>
+          </p:nvPr>
+        </p:nvSpPr>
+        <p:spPr/>
+      </p:sp>
+      <p:sp>
+        <p:nvSpPr>
+          <p:cNvPr id="3" name="Заметки 2"/>
+          <p:cNvSpPr>
+            <a:spLocks noGrp="1"/>
+          </p:cNvSpPr>
+          <p:nvPr>
+            <p:ph type="body" idx="1"/>
+          </p:nvPr>
+        </p:nvSpPr>
+        <p:spPr/>
+        <p:txBody>
+          <a:bodyPr/>
+          <a:lstStyle/>
+          <a:p>
+            <a:endParaRPr lang="ru-RU" dirty="0"/>
+          </a:p>
+        </p:txBody>
+      </p:sp>
+      <p:sp>
+        <p:nvSpPr>
+          <p:cNvPr id="4" name="Номер слайда 3"/>
+          <p:cNvSpPr>
+            <a:spLocks noGrp="1"/>
+          </p:cNvSpPr>
+          <p:nvPr>
+            <p:ph type="sldNum" sz="quarter" idx="10"/>
+          </p:nvPr>
+        </p:nvSpPr>
+        <p:spPr/>
+        <p:txBody>
+          <a:bodyPr/>
+          <a:lstStyle/>
+          <a:p>
+            <a:fld id="{A04877F8-27F3-450C-B9B9-2CB6006733C5}" type="slidenum">
+              <a:rPr lang="ru-RU" smtClean="0"/>
+              <a:t>7</a:t>
+            </a:fld>
+            <a:endParaRPr lang="ru-RU"/>
+          </a:p>
+        </p:txBody>
+      </p:sp>
+    </p:spTree>
+    <p:extLst>
+      <p:ext uri="{BB962C8B-B14F-4D97-AF65-F5344CB8AC3E}">
+        <p14:creationId xmlns:p14="http://schemas.microsoft.com/office/powerpoint/2010/main" val="1933651157"/>
+      </p:ext>
+    </p:extLst>
+  </p:cSld>
+  <p:clrMapOvr>
+    <a:masterClrMapping/>
+  </p:clrMapOvr>
+</p:notes>
+</file>
+
 <file path=ppt/slideLayouts/slideLayout1.xml><?xml version="1.0" encoding="utf-8"?>
 <p:sldLayout xmlns:a="http://schemas.openxmlformats.org/drawingml/2006/main" xmlns:r="http://schemas.openxmlformats.org/officeDocument/2006/relationships" xmlns:p="http://schemas.openxmlformats.org/presentationml/2006/main" type="title" preserve="1">
   <p:cSld name="Титульный слайд">
@@ -293,7 +731,7 @@
           <a:p>
             <a:fld id="{2FDE4DFC-8A07-4EE2-80AC-77A266D0ED59}" type="datetimeFigureOut">
               <a:rPr lang="ru-RU" smtClean="0"/>
-              <a:t>07.05.2026</a:t>
+              <a:t>13.05.2026</a:t>
             </a:fld>
             <a:endParaRPr lang="ru-RU"/>
           </a:p>
@@ -463,7 +901,7 @@
           <a:p>
             <a:fld id="{2FDE4DFC-8A07-4EE2-80AC-77A266D0ED59}" type="datetimeFigureOut">
               <a:rPr lang="ru-RU" smtClean="0"/>
-              <a:t>07.05.2026</a:t>
+              <a:t>13.05.2026</a:t>
             </a:fld>
             <a:endParaRPr lang="ru-RU"/>
           </a:p>
@@ -643,7 +1081,7 @@
           <a:p>
             <a:fld id="{2FDE4DFC-8A07-4EE2-80AC-77A266D0ED59}" type="datetimeFigureOut">
               <a:rPr lang="ru-RU" smtClean="0"/>
-              <a:t>07.05.2026</a:t>
+              <a:t>13.05.2026</a:t>
             </a:fld>
             <a:endParaRPr lang="ru-RU"/>
           </a:p>
@@ -813,7 +1251,7 @@
           <a:p>
             <a:fld id="{2FDE4DFC-8A07-4EE2-80AC-77A266D0ED59}" type="datetimeFigureOut">
               <a:rPr lang="ru-RU" smtClean="0"/>
-              <a:t>07.05.2026</a:t>
+              <a:t>13.05.2026</a:t>
             </a:fld>
             <a:endParaRPr lang="ru-RU"/>
           </a:p>
@@ -1059,7 +1497,7 @@
           <a:p>
             <a:fld id="{2FDE4DFC-8A07-4EE2-80AC-77A266D0ED59}" type="datetimeFigureOut">
               <a:rPr lang="ru-RU" smtClean="0"/>
-              <a:t>07.05.2026</a:t>
+              <a:t>13.05.2026</a:t>
             </a:fld>
             <a:endParaRPr lang="ru-RU"/>
           </a:p>
@@ -1347,7 +1785,7 @@
           <a:p>
             <a:fld id="{2FDE4DFC-8A07-4EE2-80AC-77A266D0ED59}" type="datetimeFigureOut">
               <a:rPr lang="ru-RU" smtClean="0"/>
-              <a:t>07.05.2026</a:t>
+              <a:t>13.05.2026</a:t>
             </a:fld>
             <a:endParaRPr lang="ru-RU"/>
           </a:p>
@@ -1769,7 +2207,7 @@
           <a:p>
             <a:fld id="{2FDE4DFC-8A07-4EE2-80AC-77A266D0ED59}" type="datetimeFigureOut">
               <a:rPr lang="ru-RU" smtClean="0"/>
-              <a:t>07.05.2026</a:t>
+              <a:t>13.05.2026</a:t>
             </a:fld>
             <a:endParaRPr lang="ru-RU"/>
           </a:p>
@@ -1887,7 +2325,7 @@
           <a:p>
             <a:fld id="{2FDE4DFC-8A07-4EE2-80AC-77A266D0ED59}" type="datetimeFigureOut">
               <a:rPr lang="ru-RU" smtClean="0"/>
-              <a:t>07.05.2026</a:t>
+              <a:t>13.05.2026</a:t>
             </a:fld>
             <a:endParaRPr lang="ru-RU"/>
           </a:p>
@@ -1982,7 +2420,7 @@
           <a:p>
             <a:fld id="{2FDE4DFC-8A07-4EE2-80AC-77A266D0ED59}" type="datetimeFigureOut">
               <a:rPr lang="ru-RU" smtClean="0"/>
-              <a:t>07.05.2026</a:t>
+              <a:t>13.05.2026</a:t>
             </a:fld>
             <a:endParaRPr lang="ru-RU"/>
           </a:p>
@@ -2259,7 +2697,7 @@
           <a:p>
             <a:fld id="{2FDE4DFC-8A07-4EE2-80AC-77A266D0ED59}" type="datetimeFigureOut">
               <a:rPr lang="ru-RU" smtClean="0"/>
-              <a:t>07.05.2026</a:t>
+              <a:t>13.05.2026</a:t>
             </a:fld>
             <a:endParaRPr lang="ru-RU"/>
           </a:p>
@@ -2512,7 +2950,7 @@
           <a:p>
             <a:fld id="{2FDE4DFC-8A07-4EE2-80AC-77A266D0ED59}" type="datetimeFigureOut">
               <a:rPr lang="ru-RU" smtClean="0"/>
-              <a:t>07.05.2026</a:t>
+              <a:t>13.05.2026</a:t>
             </a:fld>
             <a:endParaRPr lang="ru-RU"/>
           </a:p>
@@ -2725,7 +3163,7 @@
           <a:p>
             <a:fld id="{2FDE4DFC-8A07-4EE2-80AC-77A266D0ED59}" type="datetimeFigureOut">
               <a:rPr lang="ru-RU" smtClean="0"/>
-              <a:t>07.05.2026</a:t>
+              <a:t>13.05.2026</a:t>
             </a:fld>
             <a:endParaRPr lang="ru-RU"/>
           </a:p>
@@ -3294,7 +3732,12 @@
             <p:ph type="title"/>
           </p:nvPr>
         </p:nvSpPr>
-        <p:spPr/>
+        <p:spPr>
+          <a:xfrm>
+            <a:off x="467544" y="116632"/>
+            <a:ext cx="8229600" cy="1143000"/>
+          </a:xfrm>
+        </p:spPr>
         <p:txBody>
           <a:bodyPr>
             <a:normAutofit/>
@@ -3323,8 +3766,8 @@
         </p:nvSpPr>
         <p:spPr>
           <a:xfrm>
-            <a:off x="467544" y="1340768"/>
-            <a:ext cx="8229600" cy="4997152"/>
+            <a:off x="323528" y="1196752"/>
+            <a:ext cx="5760640" cy="4997152"/>
           </a:xfrm>
         </p:spPr>
         <p:txBody>
@@ -3396,61 +3839,50 @@
                 <a:latin typeface="Arial" pitchFamily="34" charset="0"/>
                 <a:cs typeface="Arial" pitchFamily="34" charset="0"/>
               </a:rPr>
-              <a:t>SQLite </a:t>
+              <a:t>SQLite - </a:t>
+            </a:r>
+            <a:r>
+              <a:rPr lang="ru-RU" sz="1800" dirty="0">
+                <a:latin typeface="Arial" pitchFamily="34" charset="0"/>
+                <a:cs typeface="Arial" pitchFamily="34" charset="0"/>
+              </a:rPr>
+              <a:t>лёгкая встраиваемая </a:t>
+            </a:r>
+            <a:r>
+              <a:rPr lang="ru-RU" sz="1800" dirty="0" smtClean="0">
+                <a:latin typeface="Arial" pitchFamily="34" charset="0"/>
+                <a:cs typeface="Arial" pitchFamily="34" charset="0"/>
+              </a:rPr>
+              <a:t>СУБД</a:t>
             </a:r>
             <a:r>
               <a:rPr lang="en-US" sz="1800" dirty="0" smtClean="0">
                 <a:latin typeface="Arial" pitchFamily="34" charset="0"/>
                 <a:cs typeface="Arial" pitchFamily="34" charset="0"/>
               </a:rPr>
-              <a:t>- </a:t>
+              <a:t> </a:t>
+            </a:r>
+            <a:r>
+              <a:rPr lang="ru-RU" sz="1800" dirty="0" smtClean="0">
+                <a:latin typeface="Arial" pitchFamily="34" charset="0"/>
+                <a:cs typeface="Arial" pitchFamily="34" charset="0"/>
+              </a:rPr>
+              <a:t>и </a:t>
             </a:r>
             <a:r>
               <a:rPr lang="ru-RU" sz="1800" dirty="0">
                 <a:latin typeface="Arial" pitchFamily="34" charset="0"/>
                 <a:cs typeface="Arial" pitchFamily="34" charset="0"/>
               </a:rPr>
-              <a:t>лёгкая встраиваемая </a:t>
+              <a:t>для работы с базой </a:t>
             </a:r>
             <a:r>
               <a:rPr lang="ru-RU" sz="1800" dirty="0" smtClean="0">
                 <a:latin typeface="Arial" pitchFamily="34" charset="0"/>
                 <a:cs typeface="Arial" pitchFamily="34" charset="0"/>
               </a:rPr>
-              <a:t>СУБД</a:t>
-            </a:r>
-            <a:r>
-              <a:rPr lang="en-US" sz="1800" dirty="0" smtClean="0">
-                <a:latin typeface="Arial" pitchFamily="34" charset="0"/>
-                <a:cs typeface="Arial" pitchFamily="34" charset="0"/>
-              </a:rPr>
-              <a:t> </a:t>
-            </a:r>
-            <a:r>
-              <a:rPr lang="ru-RU" sz="1800" dirty="0" smtClean="0">
-                <a:latin typeface="Arial" pitchFamily="34" charset="0"/>
-                <a:cs typeface="Arial" pitchFamily="34" charset="0"/>
-              </a:rPr>
-              <a:t>и </a:t>
-            </a:r>
-            <a:r>
-              <a:rPr lang="ru-RU" sz="1800" dirty="0">
-                <a:latin typeface="Arial" pitchFamily="34" charset="0"/>
-                <a:cs typeface="Arial" pitchFamily="34" charset="0"/>
-              </a:rPr>
-              <a:t>для работы с базой </a:t>
-            </a:r>
-            <a:r>
-              <a:rPr lang="ru-RU" sz="1800" dirty="0" smtClean="0">
-                <a:latin typeface="Arial" pitchFamily="34" charset="0"/>
-                <a:cs typeface="Arial" pitchFamily="34" charset="0"/>
-              </a:rPr>
               <a:t>данных</a:t>
             </a:r>
-            <a:endParaRPr lang="ru-RU" sz="1800" dirty="0" smtClean="0">
-              <a:latin typeface="Arial" pitchFamily="34" charset="0"/>
-              <a:cs typeface="Arial" pitchFamily="34" charset="0"/>
-            </a:endParaRPr>
           </a:p>
           <a:p>
             <a:r>
@@ -3690,123 +4122,12 @@
               <a:t> форм и защита от </a:t>
             </a:r>
             <a:r>
-              <a:rPr lang="en-US" sz="1800" dirty="0">
+              <a:rPr lang="en-US" sz="1800" dirty="0" smtClean="0">
                 <a:latin typeface="Arial" pitchFamily="34" charset="0"/>
                 <a:cs typeface="Arial" pitchFamily="34" charset="0"/>
               </a:rPr>
               <a:t>CSRF</a:t>
             </a:r>
-          </a:p>
-          <a:p>
-            <a:r>
-              <a:rPr lang="ru-RU" sz="1800" b="1" dirty="0">
-                <a:latin typeface="Arial" pitchFamily="34" charset="0"/>
-                <a:cs typeface="Arial" pitchFamily="34" charset="0"/>
-              </a:rPr>
-              <a:t>Дополнительно</a:t>
-            </a:r>
-            <a:endParaRPr lang="ru-RU" sz="1800" dirty="0">
-              <a:latin typeface="Arial" pitchFamily="34" charset="0"/>
-              <a:cs typeface="Arial" pitchFamily="34" charset="0"/>
-            </a:endParaRPr>
-          </a:p>
-          <a:p>
-            <a:pPr lvl="1">
-              <a:buFont typeface="Arial" pitchFamily="34" charset="0"/>
-              <a:buChar char="•"/>
-            </a:pPr>
-            <a:r>
-              <a:rPr lang="en-US" sz="1800" dirty="0" err="1">
-                <a:latin typeface="Arial" pitchFamily="34" charset="0"/>
-                <a:cs typeface="Arial" pitchFamily="34" charset="0"/>
-              </a:rPr>
-              <a:t>pytest</a:t>
-            </a:r>
-            <a:r>
-              <a:rPr lang="en-US" sz="1800" dirty="0">
-                <a:latin typeface="Arial" pitchFamily="34" charset="0"/>
-                <a:cs typeface="Arial" pitchFamily="34" charset="0"/>
-              </a:rPr>
-              <a:t> </a:t>
-            </a:r>
-            <a:r>
-              <a:rPr lang="en-US" sz="1800" dirty="0" smtClean="0">
-                <a:latin typeface="Arial" pitchFamily="34" charset="0"/>
-                <a:cs typeface="Arial" pitchFamily="34" charset="0"/>
-              </a:rPr>
-              <a:t>- </a:t>
-            </a:r>
-            <a:r>
-              <a:rPr lang="ru-RU" sz="1800" dirty="0">
-                <a:latin typeface="Arial" pitchFamily="34" charset="0"/>
-                <a:cs typeface="Arial" pitchFamily="34" charset="0"/>
-              </a:rPr>
-              <a:t>тестирование </a:t>
-            </a:r>
-            <a:r>
-              <a:rPr lang="en-US" sz="1800" dirty="0">
-                <a:latin typeface="Arial" pitchFamily="34" charset="0"/>
-                <a:cs typeface="Arial" pitchFamily="34" charset="0"/>
-              </a:rPr>
-              <a:t>API </a:t>
-            </a:r>
-            <a:r>
-              <a:rPr lang="ru-RU" sz="1800" dirty="0">
-                <a:latin typeface="Arial" pitchFamily="34" charset="0"/>
-                <a:cs typeface="Arial" pitchFamily="34" charset="0"/>
-              </a:rPr>
-              <a:t>и бизнес-логики</a:t>
-            </a:r>
-          </a:p>
-          <a:p>
-            <a:pPr lvl="1">
-              <a:buFont typeface="Arial" pitchFamily="34" charset="0"/>
-              <a:buChar char="•"/>
-            </a:pPr>
-            <a:r>
-              <a:rPr lang="ru-RU" sz="1800" dirty="0" err="1">
-                <a:latin typeface="Arial" pitchFamily="34" charset="0"/>
-                <a:cs typeface="Arial" pitchFamily="34" charset="0"/>
-              </a:rPr>
-              <a:t>Валидация</a:t>
-            </a:r>
-            <a:r>
-              <a:rPr lang="ru-RU" sz="1800" dirty="0">
-                <a:latin typeface="Arial" pitchFamily="34" charset="0"/>
-                <a:cs typeface="Arial" pitchFamily="34" charset="0"/>
-              </a:rPr>
-              <a:t> </a:t>
-            </a:r>
-            <a:r>
-              <a:rPr lang="en-US" sz="1800" dirty="0">
-                <a:latin typeface="Arial" pitchFamily="34" charset="0"/>
-                <a:cs typeface="Arial" pitchFamily="34" charset="0"/>
-              </a:rPr>
-              <a:t>JSON-</a:t>
-            </a:r>
-            <a:r>
-              <a:rPr lang="ru-RU" sz="1800" dirty="0">
-                <a:latin typeface="Arial" pitchFamily="34" charset="0"/>
-                <a:cs typeface="Arial" pitchFamily="34" charset="0"/>
-              </a:rPr>
-              <a:t>ответов </a:t>
-            </a:r>
-            <a:r>
-              <a:rPr lang="en-US" sz="1800" dirty="0" smtClean="0">
-                <a:latin typeface="Arial" pitchFamily="34" charset="0"/>
-                <a:cs typeface="Arial" pitchFamily="34" charset="0"/>
-              </a:rPr>
-              <a:t>API</a:t>
-            </a:r>
-            <a:endParaRPr lang="en-US" sz="1800" dirty="0">
-              <a:latin typeface="Arial" pitchFamily="34" charset="0"/>
-              <a:cs typeface="Arial" pitchFamily="34" charset="0"/>
-            </a:endParaRPr>
-          </a:p>
-          <a:p>
-            <a:pPr marL="0" indent="0">
-              <a:buNone/>
-            </a:pPr>
             <a:r>
               <a:rPr lang="en-US" sz="1800" dirty="0" smtClean="0"/>
               <a:t/>
@@ -3865,7 +4186,12 @@
             <p:ph type="title"/>
           </p:nvPr>
         </p:nvSpPr>
-        <p:spPr/>
+        <p:spPr>
+          <a:xfrm>
+            <a:off x="467544" y="116632"/>
+            <a:ext cx="8229600" cy="1143000"/>
+          </a:xfrm>
+        </p:spPr>
         <p:txBody>
           <a:bodyPr>
             <a:normAutofit fontScale="90000"/>
@@ -3902,8 +4228,8 @@
         </p:nvSpPr>
         <p:spPr>
           <a:xfrm>
-            <a:off x="467544" y="1268760"/>
-            <a:ext cx="8229600" cy="4525963"/>
+            <a:off x="323528" y="1196752"/>
+            <a:ext cx="6048672" cy="4525963"/>
           </a:xfrm>
         </p:spPr>
         <p:txBody>
@@ -4063,70 +4389,19 @@
                 <a:latin typeface="Arial" pitchFamily="34" charset="0"/>
                 <a:cs typeface="Arial" pitchFamily="34" charset="0"/>
               </a:rPr>
-              <a:t>История выдачи (опционально - в будущем расширении)</a:t>
-            </a:r>
-          </a:p>
-          <a:p>
-            <a:r>
-              <a:rPr lang="ru-RU" sz="1800" b="1" dirty="0">
-                <a:latin typeface="Arial" pitchFamily="34" charset="0"/>
-                <a:cs typeface="Arial" pitchFamily="34" charset="0"/>
-              </a:rPr>
-              <a:t>Интерфейс</a:t>
-            </a:r>
-          </a:p>
-          <a:p>
-            <a:pPr lvl="1">
-              <a:buFont typeface="Arial" pitchFamily="34" charset="0"/>
-              <a:buChar char="•"/>
-            </a:pPr>
-            <a:r>
-              <a:rPr lang="ru-RU" sz="1800" dirty="0">
-                <a:latin typeface="Arial" pitchFamily="34" charset="0"/>
-                <a:cs typeface="Arial" pitchFamily="34" charset="0"/>
-              </a:rPr>
-              <a:t>Адаптивный дизайн (</a:t>
-            </a:r>
-            <a:r>
-              <a:rPr lang="ru-RU" sz="1800" dirty="0" err="1">
-                <a:latin typeface="Arial" pitchFamily="34" charset="0"/>
-                <a:cs typeface="Arial" pitchFamily="34" charset="0"/>
-              </a:rPr>
-              <a:t>mobile-first</a:t>
-            </a:r>
-            <a:r>
-              <a:rPr lang="ru-RU" sz="1800" dirty="0">
-                <a:latin typeface="Arial" pitchFamily="34" charset="0"/>
-                <a:cs typeface="Arial" pitchFamily="34" charset="0"/>
-              </a:rPr>
-              <a:t>)</a:t>
-            </a:r>
-          </a:p>
-          <a:p>
-            <a:pPr lvl="1">
-              <a:buFont typeface="Arial" pitchFamily="34" charset="0"/>
-              <a:buChar char="•"/>
-            </a:pPr>
-            <a:r>
-              <a:rPr lang="ru-RU" sz="1800" dirty="0">
-                <a:latin typeface="Arial" pitchFamily="34" charset="0"/>
-                <a:cs typeface="Arial" pitchFamily="34" charset="0"/>
-              </a:rPr>
-              <a:t>Карточки книг с обложками и кнопками действий</a:t>
-            </a:r>
-          </a:p>
-          <a:p>
-            <a:pPr lvl="1">
-              <a:buFont typeface="Arial" pitchFamily="34" charset="0"/>
-              <a:buChar char="•"/>
-            </a:pPr>
-            <a:r>
-              <a:rPr lang="ru-RU" sz="1800" dirty="0">
-                <a:latin typeface="Arial" pitchFamily="34" charset="0"/>
-                <a:cs typeface="Arial" pitchFamily="34" charset="0"/>
-              </a:rPr>
-              <a:t>Поиск и фильтрация в реальном времени</a:t>
-            </a:r>
+              <a:t>История выдачи (опционально - в будущем </a:t>
+            </a:r>
+            <a:r>
+              <a:rPr lang="ru-RU" sz="1800" dirty="0" smtClean="0">
+                <a:latin typeface="Arial" pitchFamily="34" charset="0"/>
+                <a:cs typeface="Arial" pitchFamily="34" charset="0"/>
+              </a:rPr>
+              <a:t>расширении</a:t>
+            </a:r>
+            <a:endParaRPr lang="ru-RU" sz="1800" dirty="0">
+              <a:latin typeface="Arial" pitchFamily="34" charset="0"/>
+              <a:cs typeface="Arial" pitchFamily="34" charset="0"/>
+            </a:endParaRPr>
           </a:p>
         </p:txBody>
       </p:sp>
@@ -4180,321 +4455,139 @@
         <p:spPr/>
         <p:txBody>
           <a:bodyPr>
-            <a:normAutofit/>
+            <a:normAutofit fontScale="90000"/>
           </a:bodyPr>
           <a:lstStyle/>
           <a:p>
             <a:r>
-              <a:rPr lang="ru-RU" cap="all" dirty="0">
-                <a:latin typeface="Arial" pitchFamily="34" charset="0"/>
-                <a:cs typeface="Arial" pitchFamily="34" charset="0"/>
-              </a:rPr>
-              <a:t>Ключевые особенности</a:t>
-            </a:r>
-          </a:p>
-        </p:txBody>
-      </p:sp>
-      <p:sp>
-        <p:nvSpPr>
-          <p:cNvPr id="3" name="Объект 2"/>
-          <p:cNvSpPr>
-            <a:spLocks noGrp="1"/>
-          </p:cNvSpPr>
-          <p:nvPr>
-            <p:ph idx="1"/>
-          </p:nvPr>
-        </p:nvSpPr>
-        <p:spPr>
-          <a:xfrm>
-            <a:off x="467544" y="1268760"/>
-            <a:ext cx="8229600" cy="4525963"/>
-          </a:xfrm>
-        </p:spPr>
-        <p:txBody>
-          <a:bodyPr>
-            <a:noAutofit/>
-          </a:bodyPr>
-          <a:lstStyle/>
-          <a:p>
-            <a:r>
-              <a:rPr lang="ru-RU" sz="1800" b="1" dirty="0">
-                <a:latin typeface="Arial" pitchFamily="34" charset="0"/>
-                <a:cs typeface="Arial" pitchFamily="34" charset="0"/>
-              </a:rPr>
-              <a:t>Пользовательская изоляция</a:t>
-            </a:r>
-            <a:endParaRPr lang="en-US" sz="1800" b="1" dirty="0">
+              <a:rPr lang="ru-RU" dirty="0" smtClean="0">
+                <a:latin typeface="Arial" pitchFamily="34" charset="0"/>
+                <a:cs typeface="Arial" pitchFamily="34" charset="0"/>
+              </a:rPr>
+              <a:t>ОКНА ВХОДА </a:t>
+            </a:r>
+            <a:r>
+              <a:rPr lang="en-US" dirty="0" smtClean="0">
+                <a:latin typeface="Arial" pitchFamily="34" charset="0"/>
+                <a:cs typeface="Arial" pitchFamily="34" charset="0"/>
+              </a:rPr>
+              <a:t>/</a:t>
+            </a:r>
+            <a:r>
+              <a:rPr lang="ru-RU" dirty="0" smtClean="0">
+                <a:latin typeface="Arial" pitchFamily="34" charset="0"/>
+                <a:cs typeface="Arial" pitchFamily="34" charset="0"/>
+              </a:rPr>
+              <a:t> РЕГИСТРАЦИИ</a:t>
+            </a:r>
+            <a:endParaRPr lang="ru-RU" dirty="0">
               <a:latin typeface="Arial" pitchFamily="34" charset="0"/>
               <a:cs typeface="Arial" pitchFamily="34" charset="0"/>
             </a:endParaRPr>
           </a:p>
-          <a:p>
-            <a:pPr lvl="1">
-              <a:buFont typeface="Arial" pitchFamily="34" charset="0"/>
-              <a:buChar char="•"/>
-            </a:pPr>
-            <a:r>
-              <a:rPr lang="ru-RU" sz="1800" dirty="0">
-                <a:latin typeface="Arial" pitchFamily="34" charset="0"/>
-                <a:cs typeface="Arial" pitchFamily="34" charset="0"/>
-              </a:rPr>
-              <a:t>Каждый пользователь видит только свои книги (без пересечений).</a:t>
-            </a:r>
-          </a:p>
-          <a:p>
-            <a:r>
-              <a:rPr lang="ru-RU" sz="1800" b="1" dirty="0">
-                <a:latin typeface="Arial" pitchFamily="34" charset="0"/>
-                <a:cs typeface="Arial" pitchFamily="34" charset="0"/>
-              </a:rPr>
-              <a:t>Гибкое управление метаданными</a:t>
-            </a:r>
-            <a:endParaRPr lang="en-US" sz="1800" b="1" dirty="0">
-              <a:latin typeface="Arial" pitchFamily="34" charset="0"/>
-              <a:cs typeface="Arial" pitchFamily="34" charset="0"/>
-            </a:endParaRPr>
-          </a:p>
-          <a:p>
-            <a:pPr lvl="1">
-              <a:buFont typeface="Arial" pitchFamily="34" charset="0"/>
-              <a:buChar char="•"/>
-            </a:pPr>
-            <a:r>
-              <a:rPr lang="ru-RU" sz="1800" dirty="0">
-                <a:latin typeface="Arial" pitchFamily="34" charset="0"/>
-                <a:cs typeface="Arial" pitchFamily="34" charset="0"/>
-              </a:rPr>
-              <a:t>Авторы и жанры - справочники: можно создавать новые или выбирать существующие.</a:t>
-            </a:r>
-          </a:p>
-          <a:p>
-            <a:r>
-              <a:rPr lang="ru-RU" sz="1800" b="1" dirty="0">
-                <a:latin typeface="Arial" pitchFamily="34" charset="0"/>
-                <a:cs typeface="Arial" pitchFamily="34" charset="0"/>
-              </a:rPr>
-              <a:t>Безопасность «из коробки»</a:t>
-            </a:r>
-            <a:endParaRPr lang="en-US" sz="1800" b="1" dirty="0">
-              <a:latin typeface="Arial" pitchFamily="34" charset="0"/>
-              <a:cs typeface="Arial" pitchFamily="34" charset="0"/>
-            </a:endParaRPr>
-          </a:p>
-          <a:p>
-            <a:pPr lvl="1">
-              <a:buFont typeface="Arial" pitchFamily="34" charset="0"/>
-              <a:buChar char="•"/>
-            </a:pPr>
-            <a:r>
-              <a:rPr lang="ru-RU" sz="1800" dirty="0">
-                <a:latin typeface="Arial" pitchFamily="34" charset="0"/>
-                <a:cs typeface="Arial" pitchFamily="34" charset="0"/>
-              </a:rPr>
-              <a:t>Защита от SQL-инъекций (</a:t>
-            </a:r>
-            <a:r>
-              <a:rPr lang="ru-RU" sz="1800" dirty="0" err="1">
-                <a:latin typeface="Arial" pitchFamily="34" charset="0"/>
-                <a:cs typeface="Arial" pitchFamily="34" charset="0"/>
-              </a:rPr>
-              <a:t>SQLAlchemy</a:t>
-            </a:r>
-            <a:r>
-              <a:rPr lang="ru-RU" sz="1800" dirty="0">
-                <a:latin typeface="Arial" pitchFamily="34" charset="0"/>
-                <a:cs typeface="Arial" pitchFamily="34" charset="0"/>
-              </a:rPr>
-              <a:t>), CSRF (</a:t>
-            </a:r>
-            <a:r>
-              <a:rPr lang="ru-RU" sz="1800" dirty="0" err="1">
-                <a:latin typeface="Arial" pitchFamily="34" charset="0"/>
-                <a:cs typeface="Arial" pitchFamily="34" charset="0"/>
-              </a:rPr>
-              <a:t>Flask</a:t>
-            </a:r>
-            <a:r>
-              <a:rPr lang="ru-RU" sz="1800" dirty="0">
-                <a:latin typeface="Arial" pitchFamily="34" charset="0"/>
-                <a:cs typeface="Arial" pitchFamily="34" charset="0"/>
-              </a:rPr>
-              <a:t>-WTF), хеширование паролей.</a:t>
-            </a:r>
-          </a:p>
-          <a:p>
-            <a:r>
-              <a:rPr lang="ru-RU" sz="1800" b="1" dirty="0">
-                <a:latin typeface="Arial" pitchFamily="34" charset="0"/>
-                <a:cs typeface="Arial" pitchFamily="34" charset="0"/>
-              </a:rPr>
-              <a:t>API-</a:t>
-            </a:r>
-            <a:r>
-              <a:rPr lang="ru-RU" sz="1800" b="1" dirty="0" err="1">
-                <a:latin typeface="Arial" pitchFamily="34" charset="0"/>
-                <a:cs typeface="Arial" pitchFamily="34" charset="0"/>
-              </a:rPr>
-              <a:t>first</a:t>
-            </a:r>
-            <a:r>
-              <a:rPr lang="ru-RU" sz="1800" b="1" dirty="0">
-                <a:latin typeface="Arial" pitchFamily="34" charset="0"/>
-                <a:cs typeface="Arial" pitchFamily="34" charset="0"/>
-              </a:rPr>
-              <a:t> подход</a:t>
-            </a:r>
-            <a:endParaRPr lang="en-US" sz="1800" b="1" dirty="0">
-              <a:latin typeface="Arial" pitchFamily="34" charset="0"/>
-              <a:cs typeface="Arial" pitchFamily="34" charset="0"/>
-            </a:endParaRPr>
-          </a:p>
-          <a:p>
-            <a:pPr lvl="1">
-              <a:buFont typeface="Arial" pitchFamily="34" charset="0"/>
-              <a:buChar char="•"/>
-            </a:pPr>
-            <a:r>
-              <a:rPr lang="ru-RU" sz="1800" dirty="0">
-                <a:latin typeface="Arial" pitchFamily="34" charset="0"/>
-                <a:cs typeface="Arial" pitchFamily="34" charset="0"/>
-              </a:rPr>
-              <a:t>Отдельный API для интеграции (например, мобильное приложение в будущем).</a:t>
-            </a:r>
-          </a:p>
-          <a:p>
-            <a:r>
-              <a:rPr lang="ru-RU" sz="1800" b="1" dirty="0" err="1">
-                <a:latin typeface="Arial" pitchFamily="34" charset="0"/>
-                <a:cs typeface="Arial" pitchFamily="34" charset="0"/>
-              </a:rPr>
-              <a:t>Тестопригодность</a:t>
-            </a:r>
-            <a:endParaRPr lang="en-US" sz="1800" b="1" dirty="0">
-              <a:latin typeface="Arial" pitchFamily="34" charset="0"/>
-              <a:cs typeface="Arial" pitchFamily="34" charset="0"/>
-            </a:endParaRPr>
-          </a:p>
-          <a:p>
-            <a:pPr lvl="1">
-              <a:buFont typeface="Arial" pitchFamily="34" charset="0"/>
-              <a:buChar char="•"/>
-            </a:pPr>
-            <a:r>
-              <a:rPr lang="ru-RU" sz="1800" dirty="0">
-                <a:latin typeface="Arial" pitchFamily="34" charset="0"/>
-                <a:cs typeface="Arial" pitchFamily="34" charset="0"/>
-              </a:rPr>
-              <a:t>Покрытие </a:t>
-            </a:r>
-            <a:r>
-              <a:rPr lang="ru-RU" sz="1800" dirty="0" err="1">
-                <a:latin typeface="Arial" pitchFamily="34" charset="0"/>
-                <a:cs typeface="Arial" pitchFamily="34" charset="0"/>
-              </a:rPr>
-              <a:t>pytest</a:t>
-            </a:r>
-            <a:r>
-              <a:rPr lang="ru-RU" sz="1800" dirty="0">
-                <a:latin typeface="Arial" pitchFamily="34" charset="0"/>
-                <a:cs typeface="Arial" pitchFamily="34" charset="0"/>
-              </a:rPr>
-              <a:t>: проверка авторизации, CRUD операций, </a:t>
-            </a:r>
-            <a:r>
-              <a:rPr lang="ru-RU" sz="1800" dirty="0" err="1">
-                <a:latin typeface="Arial" pitchFamily="34" charset="0"/>
-                <a:cs typeface="Arial" pitchFamily="34" charset="0"/>
-              </a:rPr>
-              <a:t>валидации</a:t>
-            </a:r>
-            <a:r>
-              <a:rPr lang="ru-RU" sz="1800" dirty="0">
-                <a:latin typeface="Arial" pitchFamily="34" charset="0"/>
-                <a:cs typeface="Arial" pitchFamily="34" charset="0"/>
-              </a:rPr>
-              <a:t>.</a:t>
-            </a:r>
-          </a:p>
-          <a:p>
-            <a:r>
-              <a:rPr lang="ru-RU" sz="1800" b="1" dirty="0">
-                <a:latin typeface="Arial" pitchFamily="34" charset="0"/>
-                <a:cs typeface="Arial" pitchFamily="34" charset="0"/>
-              </a:rPr>
-              <a:t>Минимализм + масштабируемость</a:t>
-            </a:r>
-            <a:endParaRPr lang="en-US" sz="1800" b="1" dirty="0">
-              <a:latin typeface="Arial" pitchFamily="34" charset="0"/>
-              <a:cs typeface="Arial" pitchFamily="34" charset="0"/>
-            </a:endParaRPr>
-          </a:p>
-          <a:p>
-            <a:pPr lvl="1">
-              <a:buFont typeface="Arial" pitchFamily="34" charset="0"/>
-              <a:buChar char="•"/>
-            </a:pPr>
-            <a:r>
-              <a:rPr lang="ru-RU" sz="1800" dirty="0">
-                <a:latin typeface="Arial" pitchFamily="34" charset="0"/>
-                <a:cs typeface="Arial" pitchFamily="34" charset="0"/>
-              </a:rPr>
-              <a:t>SQLite для старта, легко заменяется на </a:t>
-            </a:r>
-            <a:r>
-              <a:rPr lang="ru-RU" sz="1800" dirty="0" err="1">
-                <a:latin typeface="Arial" pitchFamily="34" charset="0"/>
-                <a:cs typeface="Arial" pitchFamily="34" charset="0"/>
-              </a:rPr>
-              <a:t>PostgreSQL</a:t>
-            </a:r>
-            <a:r>
-              <a:rPr lang="ru-RU" sz="1800" dirty="0">
-                <a:latin typeface="Arial" pitchFamily="34" charset="0"/>
-                <a:cs typeface="Arial" pitchFamily="34" charset="0"/>
-              </a:rPr>
-              <a:t>/</a:t>
-            </a:r>
-            <a:r>
-              <a:rPr lang="ru-RU" sz="1800" dirty="0" err="1">
-                <a:latin typeface="Arial" pitchFamily="34" charset="0"/>
-                <a:cs typeface="Arial" pitchFamily="34" charset="0"/>
-              </a:rPr>
-              <a:t>MySQL</a:t>
-            </a:r>
-            <a:r>
-              <a:rPr lang="ru-RU" sz="1800" dirty="0">
-                <a:latin typeface="Arial" pitchFamily="34" charset="0"/>
-                <a:cs typeface="Arial" pitchFamily="34" charset="0"/>
-              </a:rPr>
-              <a:t> при росте</a:t>
-            </a:r>
-            <a:r>
-              <a:rPr lang="ru-RU" sz="1800" b="1" dirty="0">
-                <a:latin typeface="Arial" pitchFamily="34" charset="0"/>
-                <a:cs typeface="Arial" pitchFamily="34" charset="0"/>
-              </a:rPr>
-              <a:t>.</a:t>
-            </a:r>
-          </a:p>
-        </p:txBody>
-      </p:sp>
+        </p:txBody>
+      </p:sp>
+      <p:pic>
+        <p:nvPicPr>
+          <p:cNvPr id="7" name="Объект 6"/>
+          <p:cNvPicPr>
+            <a:picLocks noGrp="1" noChangeAspect="1"/>
+          </p:cNvPicPr>
+          <p:nvPr>
+            <p:ph sz="half" idx="2"/>
+          </p:nvPr>
+        </p:nvPicPr>
+        <p:blipFill rotWithShape="1">
+          <a:blip r:embed="rId2" cstate="print">
+            <a:extLst>
+              <a:ext uri="{28A0092B-C50C-407E-A947-70E740481C1C}">
+                <a14:useLocalDpi xmlns:a14="http://schemas.microsoft.com/office/drawing/2010/main" val="0"/>
+              </a:ext>
+            </a:extLst>
+          </a:blip>
+          <a:srcRect l="1438" t="1100" r="698" b="482"/>
+          <a:stretch/>
+        </p:blipFill>
+        <p:spPr>
+          <a:xfrm>
+            <a:off x="467544" y="1700808"/>
+            <a:ext cx="3960440" cy="2500243"/>
+          </a:xfrm>
+          <a:prstGeom prst="rect">
+            <a:avLst/>
+          </a:prstGeom>
+          <a:ln w="38100" cap="sq">
+            <a:solidFill>
+              <a:srgbClr val="000000"/>
+            </a:solidFill>
+            <a:prstDash val="solid"/>
+            <a:miter lim="800000"/>
+          </a:ln>
+          <a:effectLst>
+            <a:outerShdw blurRad="50800" dist="38100" dir="2700000" algn="tl" rotWithShape="0">
+              <a:srgbClr val="000000">
+                <a:alpha val="43000"/>
+              </a:srgbClr>
+            </a:outerShdw>
+          </a:effectLst>
+        </p:spPr>
+      </p:pic>
+      <p:pic>
+        <p:nvPicPr>
+          <p:cNvPr id="8" name="Объект 7"/>
+          <p:cNvPicPr>
+            <a:picLocks noGrp="1" noChangeAspect="1"/>
+          </p:cNvPicPr>
+          <p:nvPr>
+            <p:ph sz="quarter" idx="4"/>
+          </p:nvPr>
+        </p:nvPicPr>
+        <p:blipFill>
+          <a:blip r:embed="rId3" cstate="print">
+            <a:extLst>
+              <a:ext uri="{28A0092B-C50C-407E-A947-70E740481C1C}">
+                <a14:useLocalDpi xmlns:a14="http://schemas.microsoft.com/office/drawing/2010/main" val="0"/>
+              </a:ext>
+            </a:extLst>
+          </a:blip>
+          <a:stretch>
+            <a:fillRect/>
+          </a:stretch>
+        </p:blipFill>
+        <p:spPr>
+          <a:xfrm>
+            <a:off x="4716016" y="3356992"/>
+            <a:ext cx="4041775" cy="2551511"/>
+          </a:xfrm>
+          <a:prstGeom prst="rect">
+            <a:avLst/>
+          </a:prstGeom>
+          <a:ln w="38100" cap="sq">
+            <a:solidFill>
+              <a:srgbClr val="000000"/>
+            </a:solidFill>
+            <a:prstDash val="solid"/>
+            <a:miter lim="800000"/>
+          </a:ln>
+          <a:effectLst>
+            <a:outerShdw blurRad="50800" dist="38100" dir="2700000" algn="tl" rotWithShape="0">
+              <a:srgbClr val="000000">
+                <a:alpha val="43000"/>
+              </a:srgbClr>
+            </a:outerShdw>
+          </a:effectLst>
+        </p:spPr>
+      </p:pic>
     </p:spTree>
     <p:extLst>
       <p:ext uri="{BB962C8B-B14F-4D97-AF65-F5344CB8AC3E}">
-        <p14:creationId xmlns:p14="http://schemas.microsoft.com/office/powerpoint/2010/main" val="784446336"/>
+        <p14:creationId xmlns:p14="http://schemas.microsoft.com/office/powerpoint/2010/main" val="3993512699"/>
       </p:ext>
     </p:extLst>
   </p:cSld>
   <p:clrMapOvr>
     <a:masterClrMapping/>
   </p:clrMapOvr>
-  <p:timing>
-    <p:tnLst>
-      <p:par>
-        <p:cTn id="1" dur="indefinite" restart="never" nodeType="tmRoot"/>
-      </p:par>
-    </p:tnLst>
-  </p:timing>
 </p:sld>
 </file>
 
@@ -4525,7 +4618,12 @@
             <p:ph type="title"/>
           </p:nvPr>
         </p:nvSpPr>
-        <p:spPr/>
+        <p:spPr>
+          <a:xfrm>
+            <a:off x="467544" y="116632"/>
+            <a:ext cx="8229600" cy="1143000"/>
+          </a:xfrm>
+        </p:spPr>
         <p:txBody>
           <a:bodyPr>
             <a:normAutofit/>
@@ -4533,206 +4631,64 @@
           <a:lstStyle/>
           <a:p>
             <a:r>
-              <a:rPr lang="ru-RU" cap="all" dirty="0">
-                <a:latin typeface="Arial" pitchFamily="34" charset="0"/>
-                <a:cs typeface="Arial" pitchFamily="34" charset="0"/>
-              </a:rPr>
-              <a:t>система</a:t>
-            </a:r>
-          </a:p>
-        </p:txBody>
-      </p:sp>
-      <p:sp>
-        <p:nvSpPr>
-          <p:cNvPr id="3" name="Объект 2"/>
-          <p:cNvSpPr>
-            <a:spLocks noGrp="1"/>
-          </p:cNvSpPr>
-          <p:nvPr>
-            <p:ph idx="1"/>
-          </p:nvPr>
-        </p:nvSpPr>
-        <p:spPr>
-          <a:xfrm>
-            <a:off x="251520" y="1268760"/>
-            <a:ext cx="8229600" cy="4525963"/>
-          </a:xfrm>
-        </p:spPr>
-        <p:txBody>
-          <a:bodyPr>
-            <a:noAutofit/>
-          </a:bodyPr>
-          <a:lstStyle/>
-          <a:p>
-            <a:pPr lvl="1">
-              <a:buFont typeface="Arial" pitchFamily="34" charset="0"/>
-              <a:buChar char="•"/>
-            </a:pPr>
-            <a:r>
-              <a:rPr lang="ru-RU" sz="1800" b="1" dirty="0">
-                <a:latin typeface="Arial" pitchFamily="34" charset="0"/>
-                <a:cs typeface="Arial" pitchFamily="34" charset="0"/>
-              </a:rPr>
-              <a:t>Что делает приложение?</a:t>
-            </a:r>
-            <a:endParaRPr lang="en-US" sz="1800" b="1" dirty="0">
+              <a:rPr lang="ru-RU" cap="all" dirty="0" smtClean="0">
+                <a:latin typeface="Arial" pitchFamily="34" charset="0"/>
+                <a:cs typeface="Arial" pitchFamily="34" charset="0"/>
+              </a:rPr>
+              <a:t>основной Интерфейс</a:t>
+            </a:r>
+            <a:endParaRPr lang="ru-RU" cap="all" dirty="0">
               <a:latin typeface="Arial" pitchFamily="34" charset="0"/>
               <a:cs typeface="Arial" pitchFamily="34" charset="0"/>
             </a:endParaRPr>
           </a:p>
-          <a:p>
-            <a:pPr lvl="2"/>
-            <a:r>
-              <a:rPr lang="ru-RU" sz="1800" dirty="0">
-                <a:latin typeface="Arial" pitchFamily="34" charset="0"/>
-                <a:cs typeface="Arial" pitchFamily="34" charset="0"/>
-              </a:rPr>
-              <a:t>Пользователь регистрируется - создаёт свою личную библиотеку.</a:t>
-            </a:r>
-            <a:endParaRPr lang="en-US" sz="1800" dirty="0">
-              <a:latin typeface="Arial" pitchFamily="34" charset="0"/>
-              <a:cs typeface="Arial" pitchFamily="34" charset="0"/>
-            </a:endParaRPr>
-          </a:p>
-          <a:p>
-            <a:pPr lvl="2"/>
-            <a:r>
-              <a:rPr lang="ru-RU" sz="1800" dirty="0">
-                <a:latin typeface="Arial" pitchFamily="34" charset="0"/>
-                <a:cs typeface="Arial" pitchFamily="34" charset="0"/>
-              </a:rPr>
-              <a:t>Добавляет книги (название, автор, жанр, год, обложка).</a:t>
-            </a:r>
-            <a:endParaRPr lang="en-US" sz="1800" dirty="0">
-              <a:latin typeface="Arial" pitchFamily="34" charset="0"/>
-              <a:cs typeface="Arial" pitchFamily="34" charset="0"/>
-            </a:endParaRPr>
-          </a:p>
-          <a:p>
-            <a:pPr lvl="2"/>
-            <a:r>
-              <a:rPr lang="ru-RU" sz="1800" dirty="0">
-                <a:latin typeface="Arial" pitchFamily="34" charset="0"/>
-                <a:cs typeface="Arial" pitchFamily="34" charset="0"/>
-              </a:rPr>
-              <a:t>Выдаёт книгу другому человеку - система помечает её как «взята».</a:t>
-            </a:r>
-            <a:endParaRPr lang="en-US" sz="1800" dirty="0">
-              <a:latin typeface="Arial" pitchFamily="34" charset="0"/>
-              <a:cs typeface="Arial" pitchFamily="34" charset="0"/>
-            </a:endParaRPr>
-          </a:p>
-          <a:p>
-            <a:pPr lvl="2"/>
-            <a:r>
-              <a:rPr lang="ru-RU" sz="1800" dirty="0">
-                <a:latin typeface="Arial" pitchFamily="34" charset="0"/>
-                <a:cs typeface="Arial" pitchFamily="34" charset="0"/>
-              </a:rPr>
-              <a:t>Возвращает - книга снова становится доступной.</a:t>
-            </a:r>
-            <a:endParaRPr lang="en-US" sz="1800" dirty="0">
-              <a:latin typeface="Arial" pitchFamily="34" charset="0"/>
-              <a:cs typeface="Arial" pitchFamily="34" charset="0"/>
-            </a:endParaRPr>
-          </a:p>
-          <a:p>
-            <a:pPr lvl="1">
-              <a:buFont typeface="Arial" pitchFamily="34" charset="0"/>
-              <a:buChar char="•"/>
-            </a:pPr>
-            <a:r>
-              <a:rPr lang="ru-RU" sz="1800" b="1" dirty="0">
-                <a:latin typeface="Arial" pitchFamily="34" charset="0"/>
-                <a:cs typeface="Arial" pitchFamily="34" charset="0"/>
-              </a:rPr>
-              <a:t>Как устроено внутри?</a:t>
-            </a:r>
-          </a:p>
-          <a:p>
-            <a:pPr lvl="2"/>
-            <a:r>
-              <a:rPr lang="ru-RU" sz="1800" dirty="0" err="1">
-                <a:latin typeface="Arial" pitchFamily="34" charset="0"/>
-                <a:cs typeface="Arial" pitchFamily="34" charset="0"/>
-              </a:rPr>
-              <a:t>Бэкенд</a:t>
-            </a:r>
-            <a:r>
-              <a:rPr lang="ru-RU" sz="1800" dirty="0">
-                <a:latin typeface="Arial" pitchFamily="34" charset="0"/>
-                <a:cs typeface="Arial" pitchFamily="34" charset="0"/>
-              </a:rPr>
-              <a:t>: </a:t>
-            </a:r>
-            <a:r>
-              <a:rPr lang="ru-RU" sz="1800" dirty="0" err="1">
-                <a:latin typeface="Arial" pitchFamily="34" charset="0"/>
-                <a:cs typeface="Arial" pitchFamily="34" charset="0"/>
-              </a:rPr>
-              <a:t>Flask</a:t>
-            </a:r>
-            <a:r>
-              <a:rPr lang="ru-RU" sz="1800" dirty="0">
-                <a:latin typeface="Arial" pitchFamily="34" charset="0"/>
-                <a:cs typeface="Arial" pitchFamily="34" charset="0"/>
-              </a:rPr>
-              <a:t> (Python) - обрабатывает запросы, логику и данные.</a:t>
-            </a:r>
-          </a:p>
-          <a:p>
-            <a:pPr lvl="2"/>
-            <a:r>
-              <a:rPr lang="ru-RU" sz="1800" dirty="0">
-                <a:latin typeface="Arial" pitchFamily="34" charset="0"/>
-                <a:cs typeface="Arial" pitchFamily="34" charset="0"/>
-              </a:rPr>
-              <a:t>База данных: SQLite - хранит пользователей, книги, авторов и жанры.</a:t>
-            </a:r>
-          </a:p>
-          <a:p>
-            <a:pPr lvl="2"/>
-            <a:r>
-              <a:rPr lang="ru-RU" sz="1800" dirty="0" err="1">
-                <a:latin typeface="Arial" pitchFamily="34" charset="0"/>
-                <a:cs typeface="Arial" pitchFamily="34" charset="0"/>
-              </a:rPr>
-              <a:t>Фронтенд</a:t>
-            </a:r>
-            <a:r>
-              <a:rPr lang="ru-RU" sz="1800" dirty="0">
-                <a:latin typeface="Arial" pitchFamily="34" charset="0"/>
-                <a:cs typeface="Arial" pitchFamily="34" charset="0"/>
-              </a:rPr>
-              <a:t>: HTML + </a:t>
-            </a:r>
-            <a:r>
-              <a:rPr lang="ru-RU" sz="1800" dirty="0" err="1">
-                <a:latin typeface="Arial" pitchFamily="34" charset="0"/>
-                <a:cs typeface="Arial" pitchFamily="34" charset="0"/>
-              </a:rPr>
-              <a:t>Bootstrap</a:t>
-            </a:r>
-            <a:r>
-              <a:rPr lang="ru-RU" sz="1800" dirty="0">
-                <a:latin typeface="Arial" pitchFamily="34" charset="0"/>
-                <a:cs typeface="Arial" pitchFamily="34" charset="0"/>
-              </a:rPr>
-              <a:t> - красивый и удобный интерфейс на любом устройстве.</a:t>
-            </a:r>
-          </a:p>
-          <a:p>
-            <a:pPr lvl="2"/>
-            <a:r>
-              <a:rPr lang="ru-RU" sz="1800" dirty="0">
-                <a:latin typeface="Arial" pitchFamily="34" charset="0"/>
-                <a:cs typeface="Arial" pitchFamily="34" charset="0"/>
-              </a:rPr>
-              <a:t>Безопасность: пароли зашифрованы, формы защищены от подделки, доступ только для авторизованных.</a:t>
-            </a:r>
-          </a:p>
-        </p:txBody>
-      </p:sp>
+        </p:txBody>
+      </p:sp>
+      <p:pic>
+        <p:nvPicPr>
+          <p:cNvPr id="4" name="Объект 3"/>
+          <p:cNvPicPr>
+            <a:picLocks noGrp="1" noChangeAspect="1"/>
+          </p:cNvPicPr>
+          <p:nvPr>
+            <p:ph idx="1"/>
+          </p:nvPr>
+        </p:nvPicPr>
+        <p:blipFill rotWithShape="1">
+          <a:blip r:embed="rId2" cstate="print">
+            <a:extLst>
+              <a:ext uri="{28A0092B-C50C-407E-A947-70E740481C1C}">
+                <a14:useLocalDpi xmlns:a14="http://schemas.microsoft.com/office/drawing/2010/main" val="0"/>
+              </a:ext>
+            </a:extLst>
+          </a:blip>
+          <a:srcRect t="11275"/>
+          <a:stretch/>
+        </p:blipFill>
+        <p:spPr>
+          <a:xfrm>
+            <a:off x="467544" y="1700808"/>
+            <a:ext cx="8229600" cy="3934766"/>
+          </a:xfrm>
+          <a:prstGeom prst="rect">
+            <a:avLst/>
+          </a:prstGeom>
+          <a:ln w="38100" cap="sq">
+            <a:solidFill>
+              <a:srgbClr val="000000"/>
+            </a:solidFill>
+            <a:prstDash val="solid"/>
+            <a:miter lim="800000"/>
+          </a:ln>
+          <a:effectLst>
+            <a:outerShdw blurRad="50800" dist="38100" dir="2700000" algn="tl" rotWithShape="0">
+              <a:srgbClr val="000000">
+                <a:alpha val="43000"/>
+              </a:srgbClr>
+            </a:outerShdw>
+          </a:effectLst>
+        </p:spPr>
+      </p:pic>
     </p:spTree>
     <p:extLst>
       <p:ext uri="{BB962C8B-B14F-4D97-AF65-F5344CB8AC3E}">
@@ -4780,239 +4736,384 @@
             <p:ph type="title"/>
           </p:nvPr>
         </p:nvSpPr>
-        <p:spPr/>
-        <p:txBody>
-          <a:bodyPr/>
-          <a:lstStyle/>
-          <a:p>
-            <a:r>
-              <a:rPr lang="ru-RU" cap="all" dirty="0" smtClean="0">
-                <a:latin typeface="Arial" pitchFamily="34" charset="0"/>
-                <a:cs typeface="Arial" pitchFamily="34" charset="0"/>
-              </a:rPr>
-              <a:t>Заключение</a:t>
-            </a:r>
-            <a:endParaRPr lang="ru-RU" cap="all" dirty="0"/>
-          </a:p>
-        </p:txBody>
-      </p:sp>
-      <p:sp>
-        <p:nvSpPr>
-          <p:cNvPr id="3" name="Объект 2"/>
-          <p:cNvSpPr>
-            <a:spLocks noGrp="1"/>
-          </p:cNvSpPr>
-          <p:nvPr>
-            <p:ph idx="1"/>
-          </p:nvPr>
-        </p:nvSpPr>
         <p:spPr>
           <a:xfrm>
-            <a:off x="-324544" y="1340768"/>
-            <a:ext cx="8517632" cy="5184576"/>
+            <a:off x="0" y="116632"/>
+            <a:ext cx="9108504" cy="1143000"/>
           </a:xfrm>
         </p:spPr>
         <p:txBody>
           <a:bodyPr>
-            <a:noAutofit/>
+            <a:normAutofit/>
           </a:bodyPr>
           <a:lstStyle/>
           <a:p>
-            <a:pPr lvl="2"/>
-            <a:r>
-              <a:rPr lang="ru-RU" sz="1800" b="1" dirty="0">
-                <a:latin typeface="Arial" pitchFamily="34" charset="0"/>
-                <a:cs typeface="Arial" pitchFamily="34" charset="0"/>
-              </a:rPr>
-              <a:t>Цель достигнута:</a:t>
-            </a:r>
-          </a:p>
-          <a:p>
-            <a:pPr lvl="3">
+            <a:r>
+              <a:rPr lang="ru-RU" cap="all" dirty="0" smtClean="0">
+                <a:latin typeface="Arial" pitchFamily="34" charset="0"/>
+                <a:cs typeface="Arial" pitchFamily="34" charset="0"/>
+              </a:rPr>
+              <a:t>Окно добавления книг</a:t>
+            </a:r>
+            <a:endParaRPr lang="ru-RU" cap="all" dirty="0">
+              <a:latin typeface="Arial" pitchFamily="34" charset="0"/>
+              <a:cs typeface="Arial" pitchFamily="34" charset="0"/>
+            </a:endParaRPr>
+          </a:p>
+        </p:txBody>
+      </p:sp>
+      <p:pic>
+        <p:nvPicPr>
+          <p:cNvPr id="5" name="Объект 4"/>
+          <p:cNvPicPr>
+            <a:picLocks noGrp="1" noChangeAspect="1"/>
+          </p:cNvPicPr>
+          <p:nvPr>
+            <p:ph idx="1"/>
+          </p:nvPr>
+        </p:nvPicPr>
+        <p:blipFill>
+          <a:blip r:embed="rId2" cstate="print">
+            <a:extLst>
+              <a:ext uri="{28A0092B-C50C-407E-A947-70E740481C1C}">
+                <a14:useLocalDpi xmlns:a14="http://schemas.microsoft.com/office/drawing/2010/main" val="0"/>
+              </a:ext>
+            </a:extLst>
+          </a:blip>
+          <a:stretch>
+            <a:fillRect/>
+          </a:stretch>
+        </p:blipFill>
+        <p:spPr>
+          <a:xfrm>
+            <a:off x="728031" y="1600200"/>
+            <a:ext cx="7687937" cy="4525963"/>
+          </a:xfrm>
+          <a:prstGeom prst="rect">
+            <a:avLst/>
+          </a:prstGeom>
+          <a:ln w="38100" cap="sq">
+            <a:solidFill>
+              <a:srgbClr val="000000"/>
+            </a:solidFill>
+            <a:prstDash val="solid"/>
+            <a:miter lim="800000"/>
+          </a:ln>
+          <a:effectLst>
+            <a:outerShdw blurRad="50800" dist="38100" dir="2700000" algn="tl" rotWithShape="0">
+              <a:srgbClr val="000000">
+                <a:alpha val="43000"/>
+              </a:srgbClr>
+            </a:outerShdw>
+          </a:effectLst>
+        </p:spPr>
+      </p:pic>
+    </p:spTree>
+    <p:extLst>
+      <p:ext uri="{BB962C8B-B14F-4D97-AF65-F5344CB8AC3E}">
+        <p14:creationId xmlns:p14="http://schemas.microsoft.com/office/powerpoint/2010/main" val="3118846140"/>
+      </p:ext>
+    </p:extLst>
+  </p:cSld>
+  <p:clrMapOvr>
+    <a:masterClrMapping/>
+  </p:clrMapOvr>
+  <p:timing>
+    <p:tnLst>
+      <p:par>
+        <p:cTn id="1" dur="indefinite" restart="never" nodeType="tmRoot"/>
+      </p:par>
+    </p:tnLst>
+  </p:timing>
+</p:sld>
+</file>
+
+<file path=ppt/slides/slide7.xml><?xml version="1.0" encoding="utf-8"?>
+<p:sld xmlns:a="http://schemas.openxmlformats.org/drawingml/2006/main" xmlns:r="http://schemas.openxmlformats.org/officeDocument/2006/relationships" xmlns:p="http://schemas.openxmlformats.org/presentationml/2006/main">
+  <p:cSld>
+    <p:spTree>
+      <p:nvGrpSpPr>
+        <p:cNvPr id="1" name=""/>
+        <p:cNvGrpSpPr/>
+        <p:nvPr/>
+      </p:nvGrpSpPr>
+      <p:grpSpPr>
+        <a:xfrm>
+          <a:off x="0" y="0"/>
+          <a:ext cx="0" cy="0"/>
+          <a:chOff x="0" y="0"/>
+          <a:chExt cx="0" cy="0"/>
+        </a:xfrm>
+      </p:grpSpPr>
+      <p:sp>
+        <p:nvSpPr>
+          <p:cNvPr id="2" name="Заголовок 1"/>
+          <p:cNvSpPr>
+            <a:spLocks noGrp="1"/>
+          </p:cNvSpPr>
+          <p:nvPr>
+            <p:ph type="title"/>
+          </p:nvPr>
+        </p:nvSpPr>
+        <p:spPr>
+          <a:xfrm>
+            <a:off x="467544" y="188640"/>
+            <a:ext cx="8229600" cy="1143000"/>
+          </a:xfrm>
+        </p:spPr>
+        <p:txBody>
+          <a:bodyPr/>
+          <a:lstStyle/>
+          <a:p>
+            <a:r>
+              <a:rPr lang="ru-RU" cap="all" dirty="0" smtClean="0">
+                <a:latin typeface="Arial" pitchFamily="34" charset="0"/>
+                <a:cs typeface="Arial" pitchFamily="34" charset="0"/>
+              </a:rPr>
+              <a:t>Заключение</a:t>
+            </a:r>
+            <a:endParaRPr lang="ru-RU" cap="all" dirty="0"/>
+          </a:p>
+        </p:txBody>
+      </p:sp>
+      <p:sp>
+        <p:nvSpPr>
+          <p:cNvPr id="4" name="Прямоугольник 3"/>
+          <p:cNvSpPr/>
+          <p:nvPr/>
+        </p:nvSpPr>
+        <p:spPr>
+          <a:xfrm>
+            <a:off x="971600" y="1700808"/>
+            <a:ext cx="6768752" cy="3693319"/>
+          </a:xfrm>
+          <a:prstGeom prst="rect">
+            <a:avLst/>
+          </a:prstGeom>
+        </p:spPr>
+        <p:txBody>
+          <a:bodyPr wrap="square">
+            <a:spAutoFit/>
+          </a:bodyPr>
+          <a:lstStyle/>
+          <a:p>
+            <a:pPr marL="285750" indent="-285750">
               <a:buFont typeface="Arial" pitchFamily="34" charset="0"/>
               <a:buChar char="•"/>
             </a:pPr>
             <a:r>
-              <a:rPr lang="ru-RU" sz="1800" dirty="0">
-                <a:latin typeface="Arial" pitchFamily="34" charset="0"/>
-                <a:cs typeface="Arial" pitchFamily="34" charset="0"/>
-              </a:rPr>
-              <a:t>Реализовано веб-приложение для личного управления библиотекой с полным циклом - от регистрации до выдачи книг.</a:t>
-            </a:r>
-          </a:p>
-          <a:p>
-            <a:pPr lvl="2"/>
-            <a:r>
-              <a:rPr lang="ru-RU" sz="1800" b="1" dirty="0">
-                <a:latin typeface="Arial" pitchFamily="34" charset="0"/>
-                <a:cs typeface="Arial" pitchFamily="34" charset="0"/>
-              </a:rPr>
-              <a:t>Преимущества решения:</a:t>
-            </a:r>
-          </a:p>
-          <a:p>
-            <a:pPr lvl="3">
+              <a:rPr lang="ru-RU" b="1" dirty="0" smtClean="0">
+                <a:latin typeface="Arial" pitchFamily="34" charset="0"/>
+                <a:cs typeface="Arial" pitchFamily="34" charset="0"/>
+              </a:rPr>
+              <a:t>Итог</a:t>
+            </a:r>
+          </a:p>
+          <a:p>
+            <a:pPr marL="742950" lvl="1" indent="-285750">
               <a:buFont typeface="Arial" pitchFamily="34" charset="0"/>
               <a:buChar char="•"/>
             </a:pPr>
             <a:r>
-              <a:rPr lang="ru-RU" sz="1800" dirty="0">
-                <a:latin typeface="Arial" pitchFamily="34" charset="0"/>
-                <a:cs typeface="Arial" pitchFamily="34" charset="0"/>
-              </a:rPr>
-              <a:t>Простота развёртывания (один файл .</a:t>
-            </a:r>
-            <a:r>
-              <a:rPr lang="ru-RU" sz="1800" dirty="0" err="1">
-                <a:latin typeface="Arial" pitchFamily="34" charset="0"/>
-                <a:cs typeface="Arial" pitchFamily="34" charset="0"/>
-              </a:rPr>
-              <a:t>py</a:t>
-            </a:r>
-            <a:r>
-              <a:rPr lang="ru-RU" sz="1800" dirty="0">
-                <a:latin typeface="Arial" pitchFamily="34" charset="0"/>
-                <a:cs typeface="Arial" pitchFamily="34" charset="0"/>
-              </a:rPr>
-              <a:t>, SQLite)</a:t>
-            </a:r>
-          </a:p>
-          <a:p>
-            <a:pPr lvl="3">
+              <a:rPr lang="ru-RU" dirty="0" smtClean="0">
+                <a:latin typeface="Arial" pitchFamily="34" charset="0"/>
+                <a:cs typeface="Arial" pitchFamily="34" charset="0"/>
+              </a:rPr>
+              <a:t>Проект </a:t>
+            </a:r>
+            <a:r>
+              <a:rPr lang="ru-RU" dirty="0">
+                <a:latin typeface="Arial" pitchFamily="34" charset="0"/>
+                <a:cs typeface="Arial" pitchFamily="34" charset="0"/>
+              </a:rPr>
+              <a:t>«</a:t>
+            </a:r>
+            <a:r>
+              <a:rPr lang="ru-RU" dirty="0" err="1">
+                <a:latin typeface="Arial" pitchFamily="34" charset="0"/>
+                <a:cs typeface="Arial" pitchFamily="34" charset="0"/>
+              </a:rPr>
+              <a:t>Personal</a:t>
+            </a:r>
+            <a:r>
+              <a:rPr lang="ru-RU" dirty="0">
+                <a:latin typeface="Arial" pitchFamily="34" charset="0"/>
+                <a:cs typeface="Arial" pitchFamily="34" charset="0"/>
+              </a:rPr>
+              <a:t> </a:t>
+            </a:r>
+            <a:r>
+              <a:rPr lang="ru-RU" dirty="0" err="1">
+                <a:latin typeface="Arial" pitchFamily="34" charset="0"/>
+                <a:cs typeface="Arial" pitchFamily="34" charset="0"/>
+              </a:rPr>
+              <a:t>Library</a:t>
+            </a:r>
+            <a:r>
+              <a:rPr lang="ru-RU" dirty="0">
+                <a:latin typeface="Arial" pitchFamily="34" charset="0"/>
+                <a:cs typeface="Arial" pitchFamily="34" charset="0"/>
+              </a:rPr>
+              <a:t> </a:t>
+            </a:r>
+            <a:r>
+              <a:rPr lang="ru-RU" dirty="0" err="1">
+                <a:latin typeface="Arial" pitchFamily="34" charset="0"/>
+                <a:cs typeface="Arial" pitchFamily="34" charset="0"/>
+              </a:rPr>
+              <a:t>Manager</a:t>
+            </a:r>
+            <a:r>
+              <a:rPr lang="ru-RU" dirty="0">
+                <a:latin typeface="Arial" pitchFamily="34" charset="0"/>
+                <a:cs typeface="Arial" pitchFamily="34" charset="0"/>
+              </a:rPr>
+              <a:t>» демонстрирует комплексный подход к разработке веб-приложения, включая:</a:t>
+            </a:r>
+          </a:p>
+          <a:p>
+            <a:pPr marL="742950" lvl="1" indent="-285750">
               <a:buFont typeface="Arial" pitchFamily="34" charset="0"/>
               <a:buChar char="•"/>
             </a:pPr>
             <a:r>
-              <a:rPr lang="ru-RU" sz="1800" dirty="0">
-                <a:latin typeface="Arial" pitchFamily="34" charset="0"/>
-                <a:cs typeface="Arial" pitchFamily="34" charset="0"/>
-              </a:rPr>
-              <a:t>Чёткое разделение слоёв (MVC-</a:t>
-            </a:r>
-            <a:r>
-              <a:rPr lang="ru-RU" sz="1800" dirty="0" err="1">
-                <a:latin typeface="Arial" pitchFamily="34" charset="0"/>
-                <a:cs typeface="Arial" pitchFamily="34" charset="0"/>
-              </a:rPr>
-              <a:t>like</a:t>
-            </a:r>
-            <a:r>
-              <a:rPr lang="ru-RU" sz="1800" dirty="0">
-                <a:latin typeface="Arial" pitchFamily="34" charset="0"/>
-                <a:cs typeface="Arial" pitchFamily="34" charset="0"/>
-              </a:rPr>
-              <a:t>)</a:t>
-            </a:r>
-          </a:p>
-          <a:p>
-            <a:pPr lvl="3">
+              <a:rPr lang="ru-RU" dirty="0">
+                <a:latin typeface="Arial" pitchFamily="34" charset="0"/>
+                <a:cs typeface="Arial" pitchFamily="34" charset="0"/>
+              </a:rPr>
+              <a:t>Работу с веб-</a:t>
+            </a:r>
+            <a:r>
+              <a:rPr lang="ru-RU" dirty="0" err="1">
+                <a:latin typeface="Arial" pitchFamily="34" charset="0"/>
+                <a:cs typeface="Arial" pitchFamily="34" charset="0"/>
+              </a:rPr>
+              <a:t>фреймворком</a:t>
+            </a:r>
+            <a:r>
+              <a:rPr lang="ru-RU" dirty="0">
+                <a:latin typeface="Arial" pitchFamily="34" charset="0"/>
+                <a:cs typeface="Arial" pitchFamily="34" charset="0"/>
+              </a:rPr>
+              <a:t> </a:t>
+            </a:r>
+            <a:r>
+              <a:rPr lang="ru-RU" dirty="0" err="1">
+                <a:latin typeface="Arial" pitchFamily="34" charset="0"/>
+                <a:cs typeface="Arial" pitchFamily="34" charset="0"/>
+              </a:rPr>
+              <a:t>Flask</a:t>
+            </a:r>
+            <a:r>
+              <a:rPr lang="ru-RU" dirty="0">
+                <a:latin typeface="Arial" pitchFamily="34" charset="0"/>
+                <a:cs typeface="Arial" pitchFamily="34" charset="0"/>
+              </a:rPr>
+              <a:t> и ORM </a:t>
+            </a:r>
+            <a:r>
+              <a:rPr lang="ru-RU" dirty="0" err="1">
+                <a:latin typeface="Arial" pitchFamily="34" charset="0"/>
+                <a:cs typeface="Arial" pitchFamily="34" charset="0"/>
+              </a:rPr>
+              <a:t>SQLAlchemy</a:t>
+            </a:r>
+            <a:endParaRPr lang="ru-RU" dirty="0">
+              <a:latin typeface="Arial" pitchFamily="34" charset="0"/>
+              <a:cs typeface="Arial" pitchFamily="34" charset="0"/>
+            </a:endParaRPr>
+          </a:p>
+          <a:p>
+            <a:pPr marL="742950" lvl="1" indent="-285750">
               <a:buFont typeface="Arial" pitchFamily="34" charset="0"/>
               <a:buChar char="•"/>
             </a:pPr>
             <a:r>
-              <a:rPr lang="ru-RU" sz="1800" dirty="0">
-                <a:latin typeface="Arial" pitchFamily="34" charset="0"/>
-                <a:cs typeface="Arial" pitchFamily="34" charset="0"/>
-              </a:rPr>
-              <a:t>Готовность к расширению (API, история выдачи, уведомления)</a:t>
-            </a:r>
-          </a:p>
-          <a:p>
-            <a:pPr lvl="2"/>
-            <a:r>
-              <a:rPr lang="ru-RU" sz="1800" b="1" dirty="0">
-                <a:latin typeface="Arial" pitchFamily="34" charset="0"/>
-                <a:cs typeface="Arial" pitchFamily="34" charset="0"/>
-              </a:rPr>
-              <a:t>Дальнейшие шаги (</a:t>
-            </a:r>
-            <a:r>
-              <a:rPr lang="ru-RU" sz="1800" b="1" dirty="0" err="1">
-                <a:latin typeface="Arial" pitchFamily="34" charset="0"/>
-                <a:cs typeface="Arial" pitchFamily="34" charset="0"/>
-              </a:rPr>
-              <a:t>Roadmap</a:t>
-            </a:r>
-            <a:r>
-              <a:rPr lang="ru-RU" sz="1800" b="1" dirty="0">
-                <a:latin typeface="Arial" pitchFamily="34" charset="0"/>
-                <a:cs typeface="Arial" pitchFamily="34" charset="0"/>
-              </a:rPr>
-              <a:t>):</a:t>
-            </a:r>
-          </a:p>
-          <a:p>
-            <a:pPr lvl="3">
+              <a:rPr lang="ru-RU" dirty="0">
+                <a:latin typeface="Arial" pitchFamily="34" charset="0"/>
+                <a:cs typeface="Arial" pitchFamily="34" charset="0"/>
+              </a:rPr>
+              <a:t>Проектирование и реализацию базы данных SQLite</a:t>
+            </a:r>
+          </a:p>
+          <a:p>
+            <a:pPr marL="742950" lvl="1" indent="-285750">
               <a:buFont typeface="Arial" pitchFamily="34" charset="0"/>
               <a:buChar char="•"/>
             </a:pPr>
             <a:r>
-              <a:rPr lang="ru-RU" sz="1800" dirty="0">
-                <a:latin typeface="Arial" pitchFamily="34" charset="0"/>
-                <a:cs typeface="Arial" pitchFamily="34" charset="0"/>
-              </a:rPr>
-              <a:t>Добавить историю выдачи книг</a:t>
-            </a:r>
-          </a:p>
-          <a:p>
-            <a:pPr lvl="3">
+              <a:rPr lang="ru-RU" dirty="0">
+                <a:latin typeface="Arial" pitchFamily="34" charset="0"/>
+                <a:cs typeface="Arial" pitchFamily="34" charset="0"/>
+              </a:rPr>
+              <a:t>Систему аутентификации и авторизации пользователей</a:t>
+            </a:r>
+          </a:p>
+          <a:p>
+            <a:pPr marL="742950" lvl="1" indent="-285750">
               <a:buFont typeface="Arial" pitchFamily="34" charset="0"/>
               <a:buChar char="•"/>
             </a:pPr>
             <a:r>
-              <a:rPr lang="ru-RU" sz="1800" dirty="0">
-                <a:latin typeface="Arial" pitchFamily="34" charset="0"/>
-                <a:cs typeface="Arial" pitchFamily="34" charset="0"/>
-              </a:rPr>
-              <a:t>Реализовать поиск по ISBN / автоматическое заполнение метаданных</a:t>
-            </a:r>
-          </a:p>
-          <a:p>
-            <a:pPr lvl="3">
+              <a:rPr lang="ru-RU" dirty="0">
+                <a:latin typeface="Arial" pitchFamily="34" charset="0"/>
+                <a:cs typeface="Arial" pitchFamily="34" charset="0"/>
+              </a:rPr>
+              <a:t>Разработку </a:t>
+            </a:r>
+            <a:r>
+              <a:rPr lang="ru-RU" dirty="0" err="1">
+                <a:latin typeface="Arial" pitchFamily="34" charset="0"/>
+                <a:cs typeface="Arial" pitchFamily="34" charset="0"/>
+              </a:rPr>
+              <a:t>RESTful</a:t>
+            </a:r>
+            <a:r>
+              <a:rPr lang="ru-RU" dirty="0">
+                <a:latin typeface="Arial" pitchFamily="34" charset="0"/>
+                <a:cs typeface="Arial" pitchFamily="34" charset="0"/>
+              </a:rPr>
+              <a:t> API для работы с данными</a:t>
+            </a:r>
+          </a:p>
+          <a:p>
+            <a:pPr marL="742950" lvl="1" indent="-285750">
               <a:buFont typeface="Arial" pitchFamily="34" charset="0"/>
               <a:buChar char="•"/>
             </a:pPr>
             <a:r>
-              <a:rPr lang="ru-RU" sz="1800" dirty="0">
-                <a:latin typeface="Arial" pitchFamily="34" charset="0"/>
-                <a:cs typeface="Arial" pitchFamily="34" charset="0"/>
-              </a:rPr>
-              <a:t>Поддержка нескольких пользователей в одной библиотеке («семейная» версия)</a:t>
-            </a:r>
-          </a:p>
-          <a:p>
-            <a:pPr lvl="3">
+              <a:rPr lang="ru-RU" dirty="0">
+                <a:latin typeface="Arial" pitchFamily="34" charset="0"/>
+                <a:cs typeface="Arial" pitchFamily="34" charset="0"/>
+              </a:rPr>
+              <a:t>Создание адаптивного пользовательского интерфейса</a:t>
+            </a:r>
+          </a:p>
+          <a:p>
+            <a:pPr marL="742950" lvl="1" indent="-285750">
               <a:buFont typeface="Arial" pitchFamily="34" charset="0"/>
               <a:buChar char="•"/>
             </a:pPr>
             <a:r>
-              <a:rPr lang="ru-RU" sz="1800" dirty="0" err="1">
-                <a:latin typeface="Arial" pitchFamily="34" charset="0"/>
-                <a:cs typeface="Arial" pitchFamily="34" charset="0"/>
-              </a:rPr>
-              <a:t>Docker</a:t>
-            </a:r>
-            <a:r>
-              <a:rPr lang="ru-RU" sz="1800" dirty="0">
-                <a:latin typeface="Arial" pitchFamily="34" charset="0"/>
-                <a:cs typeface="Arial" pitchFamily="34" charset="0"/>
-              </a:rPr>
-              <a:t>-образ для </a:t>
-            </a:r>
-            <a:r>
-              <a:rPr lang="ru-RU" sz="1800" dirty="0" err="1">
-                <a:latin typeface="Arial" pitchFamily="34" charset="0"/>
-                <a:cs typeface="Arial" pitchFamily="34" charset="0"/>
-              </a:rPr>
-              <a:t>деплоя</a:t>
-            </a:r>
-            <a:endParaRPr lang="ru-RU" sz="1800" dirty="0">
-              <a:latin typeface="Arial" pitchFamily="34" charset="0"/>
-              <a:cs typeface="Arial" pitchFamily="34" charset="0"/>
-            </a:endParaRPr>
-          </a:p>
-          <a:p>
-            <a:endParaRPr lang="ru-RU" sz="1800" dirty="0"/>
+              <a:rPr lang="ru-RU" dirty="0">
+                <a:latin typeface="Arial" pitchFamily="34" charset="0"/>
+                <a:cs typeface="Arial" pitchFamily="34" charset="0"/>
+              </a:rPr>
+              <a:t>Реализацию бизнес-логики выдачи и возврата книг</a:t>
+            </a:r>
+          </a:p>
+          <a:p>
+            <a:pPr marL="742950" lvl="1" indent="-285750">
+              <a:buFont typeface="Arial" pitchFamily="34" charset="0"/>
+              <a:buChar char="•"/>
+            </a:pPr>
+            <a:r>
+              <a:rPr lang="ru-RU" dirty="0">
+                <a:latin typeface="Arial" pitchFamily="34" charset="0"/>
+                <a:cs typeface="Arial" pitchFamily="34" charset="0"/>
+              </a:rPr>
+              <a:t>Обеспечение безопасности (хеширование паролей, защита от CSRF и SQL-инъекций)</a:t>
+            </a:r>
           </a:p>
         </p:txBody>
       </p:sp>
@@ -5319,4 +5420,289 @@
   <a:objectDefaults/>
   <a:extraClrSchemeLst/>
 </a:theme>
+</file>
+
+<file path=ppt/theme/theme2.xml><?xml version="1.0" encoding="utf-8"?>
+<a:theme xmlns:a="http://schemas.openxmlformats.org/drawingml/2006/main" name="Тема Office">
+  <a:themeElements>
+    <a:clrScheme name="Стандартная">
+      <a:dk1>
+        <a:sysClr val="windowText" lastClr="000000"/>
+      </a:dk1>
+      <a:lt1>
+        <a:sysClr val="window" lastClr="FFFFFF"/>
+      </a:lt1>
+      <a:dk2>
+        <a:srgbClr val="1F497D"/>
+      </a:dk2>
+      <a:lt2>
+        <a:srgbClr val="EEECE1"/>
+      </a:lt2>
+      <a:accent1>
+        <a:srgbClr val="4F81BD"/>
+      </a:accent1>
+      <a:accent2>
+        <a:srgbClr val="C0504D"/>
+      </a:accent2>
+      <a:accent3>
+        <a:srgbClr val="9BBB59"/>
+      </a:accent3>
+      <a:accent4>
+        <a:srgbClr val="8064A2"/>
+      </a:accent4>
+      <a:accent5>
+        <a:srgbClr val="4BACC6"/>
+      </a:accent5>
+      <a:accent6>
+        <a:srgbClr val="F79646"/>
+      </a:accent6>
+      <a:hlink>
+        <a:srgbClr val="0000FF"/>
+      </a:hlink>
+      <a:folHlink>
+        <a:srgbClr val="800080"/>
+      </a:folHlink>
+    </a:clrScheme>
+    <a:fontScheme name="Стандартная">
+      <a:majorFont>
+        <a:latin typeface="Calibri"/>
+        <a:ea typeface=""/>
+        <a:cs typeface=""/>
+        <a:font script="Jpan" typeface="ＭＳ Ｐゴシック"/>
+        <a:font script="Hang" typeface="맑은 고딕"/>
+        <a:font script="Hans" typeface="宋体"/>
+        <a:font script="Hant" typeface="新細明體"/>
+        <a:font script="Arab" typeface="Times New Roman"/>
+        <a:font script="Hebr" typeface="Times New Roman"/>
+        <a:font script="Thai" typeface="Angsana New"/>
+        <a:font script="Ethi" typeface="Nyala"/>
+        <a:font script="Beng" typeface="Vrinda"/>
+        <a:font script="Gujr" typeface="Shruti"/>
+        <a:font script="Khmr" typeface="MoolBoran"/>
+        <a:font script="Knda" typeface="Tunga"/>
+        <a:font script="Guru" typeface="Raavi"/>
+        <a:font script="Cans" typeface="Euphemia"/>
+        <a:font script="Cher" typeface="Plantagenet Cherokee"/>
+        <a:font script="Yiii" typeface="Microsoft Yi Baiti"/>
+        <a:font script="Tibt" typeface="Microsoft Himalaya"/>
+        <a:font script="Thaa" typeface="MV Boli"/>
+        <a:font script="Deva" typeface="Mangal"/>
+        <a:font script="Telu" typeface="Gautami"/>
+        <a:font script="Taml" typeface="Latha"/>
+        <a:font script="Syrc" typeface="Estrangelo Edessa"/>
+        <a:font script="Orya" typeface="Kalinga"/>
+        <a:font script="Mlym" typeface="Kartika"/>
+        <a:font script="Laoo" typeface="DokChampa"/>
+        <a:font script="Sinh" typeface="Iskoola Pota"/>
+        <a:font script="Mong" typeface="Mongolian Baiti"/>
+        <a:font script="Viet" typeface="Times New Roman"/>
+        <a:font script="Uigh" typeface="Microsoft Uighur"/>
+        <a:font script="Geor" typeface="Sylfaen"/>
+      </a:majorFont>
+      <a:minorFont>
+        <a:latin typeface="Calibri"/>
+        <a:ea typeface=""/>
+        <a:cs typeface=""/>
+        <a:font script="Jpan" typeface="ＭＳ Ｐゴシック"/>
+        <a:font script="Hang" typeface="맑은 고딕"/>
+        <a:font script="Hans" typeface="宋体"/>
+        <a:font script="Hant" typeface="新細明體"/>
+        <a:font script="Arab" typeface="Arial"/>
+        <a:font script="Hebr" typeface="Arial"/>
+        <a:font script="Thai" typeface="Cordia New"/>
+        <a:font script="Ethi" typeface="Nyala"/>
+        <a:font script="Beng" typeface="Vrinda"/>
+        <a:font script="Gujr" typeface="Shruti"/>
+        <a:font script="Khmr" typeface="DaunPenh"/>
+        <a:font script="Knda" typeface="Tunga"/>
+        <a:font script="Guru" typeface="Raavi"/>
+        <a:font script="Cans" typeface="Euphemia"/>
+        <a:font script="Cher" typeface="Plantagenet Cherokee"/>
+        <a:font script="Yiii" typeface="Microsoft Yi Baiti"/>
+        <a:font script="Tibt" typeface="Microsoft Himalaya"/>
+        <a:font script="Thaa" typeface="MV Boli"/>
+        <a:font script="Deva" typeface="Mangal"/>
+        <a:font script="Telu" typeface="Gautami"/>
+        <a:font script="Taml" typeface="Latha"/>
+        <a:font script="Syrc" typeface="Estrangelo Edessa"/>
+        <a:font script="Orya" typeface="Kalinga"/>
+        <a:font script="Mlym" typeface="Kartika"/>
+        <a:font script="Laoo" typeface="DokChampa"/>
+        <a:font script="Sinh" typeface="Iskoola Pota"/>
+        <a:font script="Mong" typeface="Mongolian Baiti"/>
+        <a:font script="Viet" typeface="Arial"/>
+        <a:font script="Uigh" typeface="Microsoft Uighur"/>
+        <a:font script="Geor" typeface="Sylfaen"/>
+      </a:minorFont>
+    </a:fontScheme>
+    <a:fmtScheme name="Стандартная">
+      <a:fillStyleLst>
+        <a:solidFill>
+          <a:schemeClr val="phClr"/>
+        </a:solidFill>
+        <a:gradFill rotWithShape="1">
+          <a:gsLst>
+            <a:gs pos="0">
+              <a:schemeClr val="phClr">
+                <a:tint val="50000"/>
+                <a:satMod val="300000"/>
+              </a:schemeClr>
+            </a:gs>
+            <a:gs pos="35000">
+              <a:schemeClr val="phClr">
+                <a:tint val="37000"/>
+                <a:satMod val="300000"/>
+              </a:schemeClr>
+            </a:gs>
+            <a:gs pos="100000">
+              <a:schemeClr val="phClr">
+                <a:tint val="15000"/>
+                <a:satMod val="350000"/>
+              </a:schemeClr>
+            </a:gs>
+          </a:gsLst>
+          <a:lin ang="16200000" scaled="1"/>
+        </a:gradFill>
+        <a:gradFill rotWithShape="1">
+          <a:gsLst>
+            <a:gs pos="0">
+              <a:schemeClr val="phClr">
+                <a:shade val="51000"/>
+                <a:satMod val="130000"/>
+              </a:schemeClr>
+            </a:gs>
+            <a:gs pos="80000">
+              <a:schemeClr val="phClr">
+                <a:shade val="93000"/>
+                <a:satMod val="130000"/>
+              </a:schemeClr>
+            </a:gs>
+            <a:gs pos="100000">
+              <a:schemeClr val="phClr">
+                <a:shade val="94000"/>
+                <a:satMod val="135000"/>
+              </a:schemeClr>
+            </a:gs>
+          </a:gsLst>
+          <a:lin ang="16200000" scaled="0"/>
+        </a:gradFill>
+      </a:fillStyleLst>
+      <a:lnStyleLst>
+        <a:ln w="9525" cap="flat" cmpd="sng" algn="ctr">
+          <a:solidFill>
+            <a:schemeClr val="phClr">
+              <a:shade val="95000"/>
+              <a:satMod val="105000"/>
+            </a:schemeClr>
+          </a:solidFill>
+          <a:prstDash val="solid"/>
+        </a:ln>
+        <a:ln w="25400" cap="flat" cmpd="sng" algn="ctr">
+          <a:solidFill>
+            <a:schemeClr val="phClr"/>
+          </a:solidFill>
+          <a:prstDash val="solid"/>
+        </a:ln>
+        <a:ln w="38100" cap="flat" cmpd="sng" algn="ctr">
+          <a:solidFill>
+            <a:schemeClr val="phClr"/>
+          </a:solidFill>
+          <a:prstDash val="solid"/>
+        </a:ln>
+      </a:lnStyleLst>
+      <a:effectStyleLst>
+        <a:effectStyle>
+          <a:effectLst>
+            <a:outerShdw blurRad="40000" dist="20000" dir="5400000" rotWithShape="0">
+              <a:srgbClr val="000000">
+                <a:alpha val="38000"/>
+              </a:srgbClr>
+            </a:outerShdw>
+          </a:effectLst>
+        </a:effectStyle>
+        <a:effectStyle>
+          <a:effectLst>
+            <a:outerShdw blurRad="40000" dist="23000" dir="5400000" rotWithShape="0">
+              <a:srgbClr val="000000">
+                <a:alpha val="35000"/>
+              </a:srgbClr>
+            </a:outerShdw>
+          </a:effectLst>
+        </a:effectStyle>
+        <a:effectStyle>
+          <a:effectLst>
+            <a:outerShdw blurRad="40000" dist="23000" dir="5400000" rotWithShape="0">
+              <a:srgbClr val="000000">
+                <a:alpha val="35000"/>
+              </a:srgbClr>
+            </a:outerShdw>
+          </a:effectLst>
+          <a:scene3d>
+            <a:camera prst="orthographicFront">
+              <a:rot lat="0" lon="0" rev="0"/>
+            </a:camera>
+            <a:lightRig rig="threePt" dir="t">
+              <a:rot lat="0" lon="0" rev="1200000"/>
+            </a:lightRig>
+          </a:scene3d>
+          <a:sp3d>
+            <a:bevelT w="63500" h="25400"/>
+          </a:sp3d>
+        </a:effectStyle>
+      </a:effectStyleLst>
+      <a:bgFillStyleLst>
+        <a:solidFill>
+          <a:schemeClr val="phClr"/>
+        </a:solidFill>
+        <a:gradFill rotWithShape="1">
+          <a:gsLst>
+            <a:gs pos="0">
+              <a:schemeClr val="phClr">
+                <a:tint val="40000"/>
+                <a:satMod val="350000"/>
+              </a:schemeClr>
+            </a:gs>
+            <a:gs pos="40000">
+              <a:schemeClr val="phClr">
+                <a:tint val="45000"/>
+                <a:shade val="99000"/>
+                <a:satMod val="350000"/>
+              </a:schemeClr>
+            </a:gs>
+            <a:gs pos="100000">
+              <a:schemeClr val="phClr">
+                <a:shade val="20000"/>
+                <a:satMod val="255000"/>
+              </a:schemeClr>
+            </a:gs>
+          </a:gsLst>
+          <a:path path="circle">
+            <a:fillToRect l="50000" t="-80000" r="50000" b="180000"/>
+          </a:path>
+        </a:gradFill>
+        <a:gradFill rotWithShape="1">
+          <a:gsLst>
+            <a:gs pos="0">
+              <a:schemeClr val="phClr">
+                <a:tint val="80000"/>
+                <a:satMod val="300000"/>
+              </a:schemeClr>
+            </a:gs>
+            <a:gs pos="100000">
+              <a:schemeClr val="phClr">
+                <a:shade val="30000"/>
+                <a:satMod val="200000"/>
+              </a:schemeClr>
+            </a:gs>
+          </a:gsLst>
+          <a:path path="circle">
+            <a:fillToRect l="50000" t="50000" r="50000" b="50000"/>
+          </a:path>
+        </a:gradFill>
+      </a:bgFillStyleLst>
+    </a:fmtScheme>
+  </a:themeElements>
+  <a:objectDefaults/>
+  <a:extraClrSchemeLst/>
+</a:theme>
 </file>